--- a/output_pptx/O_Praise_The_Name_Anástasis.pptx
+++ b/output_pptx/O_Praise_The_Name_Anástasis.pptx
@@ -11,6 +11,35 @@
     <p:sldId id="259" r:id="rId10"/>
     <p:sldId id="260" r:id="rId11"/>
     <p:sldId id="261" r:id="rId12"/>
+    <p:sldId id="262" r:id="rId13"/>
+    <p:sldId id="263" r:id="rId14"/>
+    <p:sldId id="264" r:id="rId15"/>
+    <p:sldId id="265" r:id="rId16"/>
+    <p:sldId id="266" r:id="rId17"/>
+    <p:sldId id="267" r:id="rId18"/>
+    <p:sldId id="268" r:id="rId19"/>
+    <p:sldId id="269" r:id="rId20"/>
+    <p:sldId id="270" r:id="rId21"/>
+    <p:sldId id="271" r:id="rId22"/>
+    <p:sldId id="272" r:id="rId23"/>
+    <p:sldId id="273" r:id="rId24"/>
+    <p:sldId id="274" r:id="rId25"/>
+    <p:sldId id="275" r:id="rId26"/>
+    <p:sldId id="276" r:id="rId27"/>
+    <p:sldId id="277" r:id="rId28"/>
+    <p:sldId id="278" r:id="rId29"/>
+    <p:sldId id="279" r:id="rId30"/>
+    <p:sldId id="280" r:id="rId31"/>
+    <p:sldId id="281" r:id="rId32"/>
+    <p:sldId id="282" r:id="rId33"/>
+    <p:sldId id="283" r:id="rId34"/>
+    <p:sldId id="284" r:id="rId35"/>
+    <p:sldId id="285" r:id="rId36"/>
+    <p:sldId id="286" r:id="rId37"/>
+    <p:sldId id="287" r:id="rId38"/>
+    <p:sldId id="288" r:id="rId39"/>
+    <p:sldId id="289" r:id="rId40"/>
+    <p:sldId id="290" r:id="rId41"/>
   </p:sldIdLst>
   <p:sldSz cx="12191695" cy="6858000" type="screen4x3"/>
   <p:notesSz cx="6858000" cy="9144000"/>
@@ -3109,8 +3138,907 @@
         </p:nvSpPr>
         <p:spPr>
           <a:xfrm>
-            <a:off x="594360" y="1837944"/>
-            <a:ext cx="11002975" cy="685800"/>
+            <a:off x="640080" y="2500884"/>
+            <a:ext cx="10911535" cy="731520"/>
+          </a:xfrm>
+          <a:prstGeom prst="rect">
+            <a:avLst/>
+          </a:prstGeom>
+          <a:noFill/>
+        </p:spPr>
+        <p:txBody>
+          <a:bodyPr wrap="square">
+            <a:spAutoFit/>
+          </a:bodyPr>
+          <a:lstStyle/>
+          <a:p>
+            <a:pPr algn="ctr"/>
+            <a:r>
+              <a:rPr sz="4800" b="1" i="0">
+                <a:solidFill>
+                  <a:srgbClr val="FFFFFF"/>
+                </a:solidFill>
+                <a:latin typeface="Arial"/>
+              </a:rPr>
+              <a:t>カルバリの丘の     十字架の   上   で</a:t>
+            </a:r>
+          </a:p>
+        </p:txBody>
+      </p:sp>
+      <p:sp>
+        <p:nvSpPr>
+          <p:cNvPr id="3" name="TextBox 2"/>
+          <p:cNvSpPr txBox="1"/>
+          <p:nvPr/>
+        </p:nvSpPr>
+        <p:spPr>
+          <a:xfrm>
+            <a:off x="640080" y="3268980"/>
+            <a:ext cx="10911535" cy="365760"/>
+          </a:xfrm>
+          <a:prstGeom prst="rect">
+            <a:avLst/>
+          </a:prstGeom>
+          <a:noFill/>
+        </p:spPr>
+        <p:txBody>
+          <a:bodyPr wrap="square">
+            <a:spAutoFit/>
+          </a:bodyPr>
+          <a:lstStyle/>
+          <a:p>
+            <a:pPr algn="ctr"/>
+            <a:r>
+              <a:rPr sz="2400" b="0" i="1">
+                <a:solidFill>
+                  <a:srgbClr val="AAAAAA"/>
+                </a:solidFill>
+                <a:latin typeface="Arial"/>
+              </a:rPr>
+              <a:t>karubari no oka no juujika no ue de</a:t>
+            </a:r>
+          </a:p>
+        </p:txBody>
+      </p:sp>
+      <p:sp>
+        <p:nvSpPr>
+          <p:cNvPr id="4" name="TextBox 3"/>
+          <p:cNvSpPr txBox="1"/>
+          <p:nvPr/>
+        </p:nvSpPr>
+        <p:spPr>
+          <a:xfrm>
+            <a:off x="640080" y="4046220"/>
+            <a:ext cx="10911535" cy="310896"/>
+          </a:xfrm>
+          <a:prstGeom prst="rect">
+            <a:avLst/>
+          </a:prstGeom>
+          <a:noFill/>
+        </p:spPr>
+        <p:txBody>
+          <a:bodyPr wrap="square">
+            <a:spAutoFit/>
+          </a:bodyPr>
+          <a:lstStyle/>
+          <a:p>
+            <a:pPr algn="ctr"/>
+            <a:r>
+              <a:rPr sz="2000" b="0" i="1">
+                <a:solidFill>
+                  <a:srgbClr val="828282"/>
+                </a:solidFill>
+                <a:latin typeface="Arial"/>
+              </a:rPr>
+              <a:t>Para o calvário olharei</a:t>
+            </a:r>
+          </a:p>
+        </p:txBody>
+      </p:sp>
+    </p:spTree>
+  </p:cSld>
+  <p:clrMapOvr>
+    <a:masterClrMapping/>
+  </p:clrMapOvr>
+</p:sld>
+</file>
+
+<file path=ppt/slides/slide10.xml><?xml version="1.0" encoding="utf-8"?>
+<p:sld xmlns:a="http://schemas.openxmlformats.org/drawingml/2006/main" xmlns:p="http://schemas.openxmlformats.org/presentationml/2006/main" xmlns:r="http://schemas.openxmlformats.org/officeDocument/2006/relationships">
+  <p:cSld>
+    <p:bg>
+      <p:bgPr>
+        <a:solidFill>
+          <a:srgbClr val="000000"/>
+        </a:solidFill>
+        <a:effectLst/>
+      </p:bgPr>
+    </p:bg>
+    <p:spTree>
+      <p:nvGrpSpPr>
+        <p:cNvPr id="1" name=""/>
+        <p:cNvGrpSpPr/>
+        <p:nvPr/>
+      </p:nvGrpSpPr>
+      <p:grpSpPr/>
+      <p:sp>
+        <p:nvSpPr>
+          <p:cNvPr id="2" name="TextBox 1"/>
+          <p:cNvSpPr txBox="1"/>
+          <p:nvPr/>
+        </p:nvSpPr>
+        <p:spPr>
+          <a:xfrm>
+            <a:off x="640080" y="2052828"/>
+            <a:ext cx="10911535" cy="731520"/>
+          </a:xfrm>
+          <a:prstGeom prst="rect">
+            <a:avLst/>
+          </a:prstGeom>
+          <a:noFill/>
+        </p:spPr>
+        <p:txBody>
+          <a:bodyPr wrap="square">
+            <a:spAutoFit/>
+          </a:bodyPr>
+          <a:lstStyle/>
+          <a:p>
+            <a:pPr algn="ctr"/>
+            <a:r>
+              <a:rPr sz="4800" b="1" i="0">
+                <a:solidFill>
+                  <a:srgbClr val="FFFFFF"/>
+                </a:solidFill>
+                <a:latin typeface="Arial"/>
+              </a:rPr>
+              <a:t>Jesus Messias, o Senhor</a:t>
+            </a:r>
+          </a:p>
+        </p:txBody>
+      </p:sp>
+      <p:sp>
+        <p:nvSpPr>
+          <p:cNvPr id="3" name="TextBox 2"/>
+          <p:cNvSpPr txBox="1"/>
+          <p:nvPr/>
+        </p:nvSpPr>
+        <p:spPr>
+          <a:xfrm>
+            <a:off x="640080" y="2985516"/>
+            <a:ext cx="10911535" cy="731520"/>
+          </a:xfrm>
+          <a:prstGeom prst="rect">
+            <a:avLst/>
+          </a:prstGeom>
+          <a:noFill/>
+        </p:spPr>
+        <p:txBody>
+          <a:bodyPr wrap="square">
+            <a:spAutoFit/>
+          </a:bodyPr>
+          <a:lstStyle/>
+          <a:p>
+            <a:pPr algn="ctr"/>
+            <a:r>
+              <a:rPr sz="4800" b="1" i="0">
+                <a:solidFill>
+                  <a:srgbClr val="FFFFFF"/>
+                </a:solidFill>
+                <a:latin typeface="Arial"/>
+              </a:rPr>
+              <a:t>Louvai Seu nome sem cessar</a:t>
+            </a:r>
+          </a:p>
+        </p:txBody>
+      </p:sp>
+    </p:spTree>
+  </p:cSld>
+  <p:clrMapOvr>
+    <a:masterClrMapping/>
+  </p:clrMapOvr>
+</p:sld>
+</file>
+
+<file path=ppt/slides/slide11.xml><?xml version="1.0" encoding="utf-8"?>
+<p:sld xmlns:a="http://schemas.openxmlformats.org/drawingml/2006/main" xmlns:p="http://schemas.openxmlformats.org/presentationml/2006/main" xmlns:r="http://schemas.openxmlformats.org/officeDocument/2006/relationships">
+  <p:cSld>
+    <p:bg>
+      <p:bgPr>
+        <a:solidFill>
+          <a:srgbClr val="000000"/>
+        </a:solidFill>
+        <a:effectLst/>
+      </p:bgPr>
+    </p:bg>
+    <p:spTree>
+      <p:nvGrpSpPr>
+        <p:cNvPr id="1" name=""/>
+        <p:cNvGrpSpPr/>
+        <p:nvPr/>
+      </p:nvGrpSpPr>
+      <p:grpSpPr/>
+      <p:sp>
+        <p:nvSpPr>
+          <p:cNvPr id="2" name="TextBox 1"/>
+          <p:cNvSpPr txBox="1"/>
+          <p:nvPr/>
+        </p:nvSpPr>
+        <p:spPr>
+          <a:xfrm>
+            <a:off x="640080" y="2052828"/>
+            <a:ext cx="10911535" cy="731520"/>
+          </a:xfrm>
+          <a:prstGeom prst="rect">
+            <a:avLst/>
+          </a:prstGeom>
+          <a:noFill/>
+        </p:spPr>
+        <p:txBody>
+          <a:bodyPr wrap="square">
+            <a:spAutoFit/>
+          </a:bodyPr>
+          <a:lstStyle/>
+          <a:p>
+            <a:pPr algn="ctr"/>
+            <a:r>
+              <a:rPr sz="4800" b="1" i="0">
+                <a:solidFill>
+                  <a:srgbClr val="FFFFFF"/>
+                </a:solidFill>
+                <a:latin typeface="Arial"/>
+              </a:rPr>
+              <a:t>Pra sempre eu Te exaltarei</a:t>
+            </a:r>
+          </a:p>
+        </p:txBody>
+      </p:sp>
+      <p:sp>
+        <p:nvSpPr>
+          <p:cNvPr id="3" name="TextBox 2"/>
+          <p:cNvSpPr txBox="1"/>
+          <p:nvPr/>
+        </p:nvSpPr>
+        <p:spPr>
+          <a:xfrm>
+            <a:off x="640080" y="2985516"/>
+            <a:ext cx="10911535" cy="731520"/>
+          </a:xfrm>
+          <a:prstGeom prst="rect">
+            <a:avLst/>
+          </a:prstGeom>
+          <a:noFill/>
+        </p:spPr>
+        <p:txBody>
+          <a:bodyPr wrap="square">
+            <a:spAutoFit/>
+          </a:bodyPr>
+          <a:lstStyle/>
+          <a:p>
+            <a:pPr algn="ctr"/>
+            <a:r>
+              <a:rPr sz="4800" b="1" i="0">
+                <a:solidFill>
+                  <a:srgbClr val="FFFFFF"/>
+                </a:solidFill>
+                <a:latin typeface="Arial"/>
+              </a:rPr>
+              <a:t>Senhor, Senhor meu Deus</a:t>
+            </a:r>
+          </a:p>
+        </p:txBody>
+      </p:sp>
+    </p:spTree>
+  </p:cSld>
+  <p:clrMapOvr>
+    <a:masterClrMapping/>
+  </p:clrMapOvr>
+</p:sld>
+</file>
+
+<file path=ppt/slides/slide12.xml><?xml version="1.0" encoding="utf-8"?>
+<p:sld xmlns:a="http://schemas.openxmlformats.org/drawingml/2006/main" xmlns:p="http://schemas.openxmlformats.org/presentationml/2006/main" xmlns:r="http://schemas.openxmlformats.org/officeDocument/2006/relationships">
+  <p:cSld>
+    <p:bg>
+      <p:bgPr>
+        <a:solidFill>
+          <a:srgbClr val="000000"/>
+        </a:solidFill>
+        <a:effectLst/>
+      </p:bgPr>
+    </p:bg>
+    <p:spTree>
+      <p:nvGrpSpPr>
+        <p:cNvPr id="1" name=""/>
+        <p:cNvGrpSpPr/>
+        <p:nvPr/>
+      </p:nvGrpSpPr>
+      <p:grpSpPr/>
+      <p:sp>
+        <p:nvSpPr>
+          <p:cNvPr id="2" name="TextBox 1"/>
+          <p:cNvSpPr txBox="1"/>
+          <p:nvPr/>
+        </p:nvSpPr>
+        <p:spPr>
+          <a:xfrm>
+            <a:off x="640080" y="2052828"/>
+            <a:ext cx="10911535" cy="731520"/>
+          </a:xfrm>
+          <a:prstGeom prst="rect">
+            <a:avLst/>
+          </a:prstGeom>
+          <a:noFill/>
+        </p:spPr>
+        <p:txBody>
+          <a:bodyPr wrap="square">
+            <a:spAutoFit/>
+          </a:bodyPr>
+          <a:lstStyle/>
+          <a:p>
+            <a:pPr algn="ctr"/>
+            <a:r>
+              <a:rPr sz="4800" b="1" i="0">
+                <a:solidFill>
+                  <a:srgbClr val="FFFFFF"/>
+                </a:solidFill>
+                <a:latin typeface="Arial"/>
+              </a:rPr>
+              <a:t>E no terceiro dia então</a:t>
+            </a:r>
+          </a:p>
+        </p:txBody>
+      </p:sp>
+      <p:sp>
+        <p:nvSpPr>
+          <p:cNvPr id="3" name="TextBox 2"/>
+          <p:cNvSpPr txBox="1"/>
+          <p:nvPr/>
+        </p:nvSpPr>
+        <p:spPr>
+          <a:xfrm>
+            <a:off x="640080" y="2985516"/>
+            <a:ext cx="10911535" cy="731520"/>
+          </a:xfrm>
+          <a:prstGeom prst="rect">
+            <a:avLst/>
+          </a:prstGeom>
+          <a:noFill/>
+        </p:spPr>
+        <p:txBody>
+          <a:bodyPr wrap="square">
+            <a:spAutoFit/>
+          </a:bodyPr>
+          <a:lstStyle/>
+          <a:p>
+            <a:pPr algn="ctr"/>
+            <a:r>
+              <a:rPr sz="4500" b="1" i="0">
+                <a:solidFill>
+                  <a:srgbClr val="FFFFFF"/>
+                </a:solidFill>
+                <a:latin typeface="Arial"/>
+              </a:rPr>
+              <a:t>Onde está, oh morte, teu aguilhão?</a:t>
+            </a:r>
+          </a:p>
+        </p:txBody>
+      </p:sp>
+    </p:spTree>
+  </p:cSld>
+  <p:clrMapOvr>
+    <a:masterClrMapping/>
+  </p:clrMapOvr>
+</p:sld>
+</file>
+
+<file path=ppt/slides/slide13.xml><?xml version="1.0" encoding="utf-8"?>
+<p:sld xmlns:a="http://schemas.openxmlformats.org/drawingml/2006/main" xmlns:p="http://schemas.openxmlformats.org/presentationml/2006/main" xmlns:r="http://schemas.openxmlformats.org/officeDocument/2006/relationships">
+  <p:cSld>
+    <p:bg>
+      <p:bgPr>
+        <a:solidFill>
+          <a:srgbClr val="000000"/>
+        </a:solidFill>
+        <a:effectLst/>
+      </p:bgPr>
+    </p:bg>
+    <p:spTree>
+      <p:nvGrpSpPr>
+        <p:cNvPr id="1" name=""/>
+        <p:cNvGrpSpPr/>
+        <p:nvPr/>
+      </p:nvGrpSpPr>
+      <p:grpSpPr/>
+      <p:sp>
+        <p:nvSpPr>
+          <p:cNvPr id="2" name="TextBox 1"/>
+          <p:cNvSpPr txBox="1"/>
+          <p:nvPr/>
+        </p:nvSpPr>
+        <p:spPr>
+          <a:xfrm>
+            <a:off x="640080" y="2052828"/>
+            <a:ext cx="10911535" cy="731520"/>
+          </a:xfrm>
+          <a:prstGeom prst="rect">
+            <a:avLst/>
+          </a:prstGeom>
+          <a:noFill/>
+        </p:spPr>
+        <p:txBody>
+          <a:bodyPr wrap="square">
+            <a:spAutoFit/>
+          </a:bodyPr>
+          <a:lstStyle/>
+          <a:p>
+            <a:pPr algn="ctr"/>
+            <a:r>
+              <a:rPr sz="4800" b="1" i="0">
+                <a:solidFill>
+                  <a:srgbClr val="FFFFFF"/>
+                </a:solidFill>
+                <a:latin typeface="Arial"/>
+              </a:rPr>
+              <a:t>A Cristo O Rei, a adoração</a:t>
+            </a:r>
+          </a:p>
+        </p:txBody>
+      </p:sp>
+      <p:sp>
+        <p:nvSpPr>
+          <p:cNvPr id="3" name="TextBox 2"/>
+          <p:cNvSpPr txBox="1"/>
+          <p:nvPr/>
+        </p:nvSpPr>
+        <p:spPr>
+          <a:xfrm>
+            <a:off x="640080" y="2985516"/>
+            <a:ext cx="10911535" cy="731520"/>
+          </a:xfrm>
+          <a:prstGeom prst="rect">
+            <a:avLst/>
+          </a:prstGeom>
+          <a:noFill/>
+        </p:spPr>
+        <p:txBody>
+          <a:bodyPr wrap="square">
+            <a:spAutoFit/>
+          </a:bodyPr>
+          <a:lstStyle/>
+          <a:p>
+            <a:pPr algn="ctr"/>
+            <a:r>
+              <a:rPr sz="4800" b="1" i="0">
+                <a:solidFill>
+                  <a:srgbClr val="FFFFFF"/>
+                </a:solidFill>
+                <a:latin typeface="Arial"/>
+              </a:rPr>
+              <a:t>Louvai o nome do nosso Deus</a:t>
+            </a:r>
+          </a:p>
+        </p:txBody>
+      </p:sp>
+    </p:spTree>
+  </p:cSld>
+  <p:clrMapOvr>
+    <a:masterClrMapping/>
+  </p:clrMapOvr>
+</p:sld>
+</file>
+
+<file path=ppt/slides/slide14.xml><?xml version="1.0" encoding="utf-8"?>
+<p:sld xmlns:a="http://schemas.openxmlformats.org/drawingml/2006/main" xmlns:p="http://schemas.openxmlformats.org/presentationml/2006/main" xmlns:r="http://schemas.openxmlformats.org/officeDocument/2006/relationships">
+  <p:cSld>
+    <p:bg>
+      <p:bgPr>
+        <a:solidFill>
+          <a:srgbClr val="000000"/>
+        </a:solidFill>
+        <a:effectLst/>
+      </p:bgPr>
+    </p:bg>
+    <p:spTree>
+      <p:nvGrpSpPr>
+        <p:cNvPr id="1" name=""/>
+        <p:cNvGrpSpPr/>
+        <p:nvPr/>
+      </p:nvGrpSpPr>
+      <p:grpSpPr/>
+      <p:sp>
+        <p:nvSpPr>
+          <p:cNvPr id="2" name="TextBox 1"/>
+          <p:cNvSpPr txBox="1"/>
+          <p:nvPr/>
+        </p:nvSpPr>
+        <p:spPr>
+          <a:xfrm>
+            <a:off x="640080" y="2052828"/>
+            <a:ext cx="10911535" cy="731520"/>
+          </a:xfrm>
+          <a:prstGeom prst="rect">
+            <a:avLst/>
+          </a:prstGeom>
+          <a:noFill/>
+        </p:spPr>
+        <p:txBody>
+          <a:bodyPr wrap="square">
+            <a:spAutoFit/>
+          </a:bodyPr>
+          <a:lstStyle/>
+          <a:p>
+            <a:pPr algn="ctr"/>
+            <a:r>
+              <a:rPr sz="4800" b="1" i="0">
+                <a:solidFill>
+                  <a:srgbClr val="FFFFFF"/>
+                </a:solidFill>
+                <a:latin typeface="Arial"/>
+              </a:rPr>
+              <a:t>Louvai Seu nome sem cessar</a:t>
+            </a:r>
+          </a:p>
+        </p:txBody>
+      </p:sp>
+      <p:sp>
+        <p:nvSpPr>
+          <p:cNvPr id="3" name="TextBox 2"/>
+          <p:cNvSpPr txBox="1"/>
+          <p:nvPr/>
+        </p:nvSpPr>
+        <p:spPr>
+          <a:xfrm>
+            <a:off x="640080" y="2985516"/>
+            <a:ext cx="10911535" cy="731520"/>
+          </a:xfrm>
+          <a:prstGeom prst="rect">
+            <a:avLst/>
+          </a:prstGeom>
+          <a:noFill/>
+        </p:spPr>
+        <p:txBody>
+          <a:bodyPr wrap="square">
+            <a:spAutoFit/>
+          </a:bodyPr>
+          <a:lstStyle/>
+          <a:p>
+            <a:pPr algn="ctr"/>
+            <a:r>
+              <a:rPr sz="4800" b="1" i="0">
+                <a:solidFill>
+                  <a:srgbClr val="FFFFFF"/>
+                </a:solidFill>
+                <a:latin typeface="Arial"/>
+              </a:rPr>
+              <a:t>E em meio aos santos subirei</a:t>
+            </a:r>
+          </a:p>
+        </p:txBody>
+      </p:sp>
+    </p:spTree>
+  </p:cSld>
+  <p:clrMapOvr>
+    <a:masterClrMapping/>
+  </p:clrMapOvr>
+</p:sld>
+</file>
+
+<file path=ppt/slides/slide15.xml><?xml version="1.0" encoding="utf-8"?>
+<p:sld xmlns:a="http://schemas.openxmlformats.org/drawingml/2006/main" xmlns:p="http://schemas.openxmlformats.org/presentationml/2006/main" xmlns:r="http://schemas.openxmlformats.org/officeDocument/2006/relationships">
+  <p:cSld>
+    <p:bg>
+      <p:bgPr>
+        <a:solidFill>
+          <a:srgbClr val="000000"/>
+        </a:solidFill>
+        <a:effectLst/>
+      </p:bgPr>
+    </p:bg>
+    <p:spTree>
+      <p:nvGrpSpPr>
+        <p:cNvPr id="1" name=""/>
+        <p:cNvGrpSpPr/>
+        <p:nvPr/>
+      </p:nvGrpSpPr>
+      <p:grpSpPr/>
+      <p:sp>
+        <p:nvSpPr>
+          <p:cNvPr id="2" name="TextBox 1"/>
+          <p:cNvSpPr txBox="1"/>
+          <p:nvPr/>
+        </p:nvSpPr>
+        <p:spPr>
+          <a:xfrm>
+            <a:off x="640080" y="2052828"/>
+            <a:ext cx="10911535" cy="731520"/>
+          </a:xfrm>
+          <a:prstGeom prst="rect">
+            <a:avLst/>
+          </a:prstGeom>
+          <a:noFill/>
+        </p:spPr>
+        <p:txBody>
+          <a:bodyPr wrap="square">
+            <a:spAutoFit/>
+          </a:bodyPr>
+          <a:lstStyle/>
+          <a:p>
+            <a:pPr algn="ctr"/>
+            <a:r>
+              <a:rPr sz="4800" b="1" i="0">
+                <a:solidFill>
+                  <a:srgbClr val="FFFFFF"/>
+                </a:solidFill>
+                <a:latin typeface="Arial"/>
+              </a:rPr>
+              <a:t>Sua face eu contemplarei</a:t>
+            </a:r>
+          </a:p>
+        </p:txBody>
+      </p:sp>
+      <p:sp>
+        <p:nvSpPr>
+          <p:cNvPr id="3" name="TextBox 2"/>
+          <p:cNvSpPr txBox="1"/>
+          <p:nvPr/>
+        </p:nvSpPr>
+        <p:spPr>
+          <a:xfrm>
+            <a:off x="640080" y="2985516"/>
+            <a:ext cx="10911535" cy="731520"/>
+          </a:xfrm>
+          <a:prstGeom prst="rect">
+            <a:avLst/>
+          </a:prstGeom>
+          <a:noFill/>
+        </p:spPr>
+        <p:txBody>
+          <a:bodyPr wrap="square">
+            <a:spAutoFit/>
+          </a:bodyPr>
+          <a:lstStyle/>
+          <a:p>
+            <a:pPr algn="ctr"/>
+            <a:r>
+              <a:rPr sz="4800" b="1" i="0">
+                <a:solidFill>
+                  <a:srgbClr val="FFFFFF"/>
+                </a:solidFill>
+                <a:latin typeface="Arial"/>
+              </a:rPr>
+              <a:t>Louvai o nome do nosso Deus</a:t>
+            </a:r>
+          </a:p>
+        </p:txBody>
+      </p:sp>
+    </p:spTree>
+  </p:cSld>
+  <p:clrMapOvr>
+    <a:masterClrMapping/>
+  </p:clrMapOvr>
+</p:sld>
+</file>
+
+<file path=ppt/slides/slide16.xml><?xml version="1.0" encoding="utf-8"?>
+<p:sld xmlns:a="http://schemas.openxmlformats.org/drawingml/2006/main" xmlns:p="http://schemas.openxmlformats.org/presentationml/2006/main" xmlns:r="http://schemas.openxmlformats.org/officeDocument/2006/relationships">
+  <p:cSld>
+    <p:bg>
+      <p:bgPr>
+        <a:solidFill>
+          <a:srgbClr val="000000"/>
+        </a:solidFill>
+        <a:effectLst/>
+      </p:bgPr>
+    </p:bg>
+    <p:spTree>
+      <p:nvGrpSpPr>
+        <p:cNvPr id="1" name=""/>
+        <p:cNvGrpSpPr/>
+        <p:nvPr/>
+      </p:nvGrpSpPr>
+      <p:grpSpPr/>
+      <p:sp>
+        <p:nvSpPr>
+          <p:cNvPr id="2" name="TextBox 1"/>
+          <p:cNvSpPr txBox="1"/>
+          <p:nvPr/>
+        </p:nvSpPr>
+        <p:spPr>
+          <a:xfrm>
+            <a:off x="640080" y="2052828"/>
+            <a:ext cx="10911535" cy="731520"/>
+          </a:xfrm>
+          <a:prstGeom prst="rect">
+            <a:avLst/>
+          </a:prstGeom>
+          <a:noFill/>
+        </p:spPr>
+        <p:txBody>
+          <a:bodyPr wrap="square">
+            <a:spAutoFit/>
+          </a:bodyPr>
+          <a:lstStyle/>
+          <a:p>
+            <a:pPr algn="ctr"/>
+            <a:r>
+              <a:rPr sz="4800" b="1" i="0">
+                <a:solidFill>
+                  <a:srgbClr val="FFFFFF"/>
+                </a:solidFill>
+                <a:latin typeface="Arial"/>
+              </a:rPr>
+              <a:t>Louvai Seu nome sem cessar</a:t>
+            </a:r>
+          </a:p>
+        </p:txBody>
+      </p:sp>
+      <p:sp>
+        <p:nvSpPr>
+          <p:cNvPr id="3" name="TextBox 2"/>
+          <p:cNvSpPr txBox="1"/>
+          <p:nvPr/>
+        </p:nvSpPr>
+        <p:spPr>
+          <a:xfrm>
+            <a:off x="640080" y="2985516"/>
+            <a:ext cx="10911535" cy="731520"/>
+          </a:xfrm>
+          <a:prstGeom prst="rect">
+            <a:avLst/>
+          </a:prstGeom>
+          <a:noFill/>
+        </p:spPr>
+        <p:txBody>
+          <a:bodyPr wrap="square">
+            <a:spAutoFit/>
+          </a:bodyPr>
+          <a:lstStyle/>
+          <a:p>
+            <a:pPr algn="ctr"/>
+            <a:r>
+              <a:rPr sz="4800" b="1" i="0">
+                <a:solidFill>
+                  <a:srgbClr val="FFFFFF"/>
+                </a:solidFill>
+                <a:latin typeface="Arial"/>
+              </a:rPr>
+              <a:t/>
+            </a:r>
+          </a:p>
+        </p:txBody>
+      </p:sp>
+    </p:spTree>
+  </p:cSld>
+  <p:clrMapOvr>
+    <a:masterClrMapping/>
+  </p:clrMapOvr>
+</p:sld>
+</file>
+
+<file path=ppt/slides/slide17.xml><?xml version="1.0" encoding="utf-8"?>
+<p:sld xmlns:a="http://schemas.openxmlformats.org/drawingml/2006/main" xmlns:p="http://schemas.openxmlformats.org/presentationml/2006/main" xmlns:r="http://schemas.openxmlformats.org/officeDocument/2006/relationships">
+  <p:cSld>
+    <p:bg>
+      <p:bgPr>
+        <a:solidFill>
+          <a:srgbClr val="000000"/>
+        </a:solidFill>
+        <a:effectLst/>
+      </p:bgPr>
+    </p:bg>
+    <p:spTree>
+      <p:nvGrpSpPr>
+        <p:cNvPr id="1" name=""/>
+        <p:cNvGrpSpPr/>
+        <p:nvPr/>
+      </p:nvGrpSpPr>
+      <p:grpSpPr/>
+      <p:sp>
+        <p:nvSpPr>
+          <p:cNvPr id="2" name="TextBox 1"/>
+          <p:cNvSpPr txBox="1"/>
+          <p:nvPr/>
+        </p:nvSpPr>
+        <p:spPr>
+          <a:xfrm>
+            <a:off x="640080" y="2052828"/>
+            <a:ext cx="10911535" cy="731520"/>
+          </a:xfrm>
+          <a:prstGeom prst="rect">
+            <a:avLst/>
+          </a:prstGeom>
+          <a:noFill/>
+        </p:spPr>
+        <p:txBody>
+          <a:bodyPr wrap="square">
+            <a:spAutoFit/>
+          </a:bodyPr>
+          <a:lstStyle/>
+          <a:p>
+            <a:pPr algn="ctr"/>
+            <a:r>
+              <a:rPr sz="4800" b="1" i="0">
+                <a:solidFill>
+                  <a:srgbClr val="FFFFFF"/>
+                </a:solidFill>
+                <a:latin typeface="Arial"/>
+              </a:rPr>
+              <a:t/>
+            </a:r>
+          </a:p>
+        </p:txBody>
+      </p:sp>
+      <p:sp>
+        <p:nvSpPr>
+          <p:cNvPr id="3" name="TextBox 2"/>
+          <p:cNvSpPr txBox="1"/>
+          <p:nvPr/>
+        </p:nvSpPr>
+        <p:spPr>
+          <a:xfrm>
+            <a:off x="640080" y="2985516"/>
+            <a:ext cx="10911535" cy="731520"/>
+          </a:xfrm>
+          <a:prstGeom prst="rect">
+            <a:avLst/>
+          </a:prstGeom>
+          <a:noFill/>
+        </p:spPr>
+        <p:txBody>
+          <a:bodyPr wrap="square">
+            <a:spAutoFit/>
+          </a:bodyPr>
+          <a:lstStyle/>
+          <a:p>
+            <a:pPr algn="ctr"/>
+            <a:r>
+              <a:rPr sz="4800" b="1" i="0">
+                <a:solidFill>
+                  <a:srgbClr val="FFFFFF"/>
+                </a:solidFill>
+                <a:latin typeface="Arial"/>
+              </a:rPr>
+              <a:t/>
+            </a:r>
+          </a:p>
+        </p:txBody>
+      </p:sp>
+    </p:spTree>
+  </p:cSld>
+  <p:clrMapOvr>
+    <a:masterClrMapping/>
+  </p:clrMapOvr>
+</p:sld>
+</file>
+
+<file path=ppt/slides/slide18.xml><?xml version="1.0" encoding="utf-8"?>
+<p:sld xmlns:a="http://schemas.openxmlformats.org/drawingml/2006/main" xmlns:p="http://schemas.openxmlformats.org/presentationml/2006/main" xmlns:r="http://schemas.openxmlformats.org/officeDocument/2006/relationships">
+  <p:cSld>
+    <p:bg>
+      <p:bgPr>
+        <a:solidFill>
+          <a:srgbClr val="000000"/>
+        </a:solidFill>
+        <a:effectLst/>
+      </p:bgPr>
+    </p:bg>
+    <p:spTree>
+      <p:nvGrpSpPr>
+        <p:cNvPr id="1" name=""/>
+        <p:cNvGrpSpPr/>
+        <p:nvPr/>
+      </p:nvGrpSpPr>
+      <p:grpSpPr/>
+      <p:sp>
+        <p:nvSpPr>
+          <p:cNvPr id="2" name="TextBox 1"/>
+          <p:cNvSpPr txBox="1"/>
+          <p:nvPr/>
+        </p:nvSpPr>
+        <p:spPr>
+          <a:xfrm>
+            <a:off x="640080" y="2500884"/>
+            <a:ext cx="10911535" cy="731520"/>
           </a:xfrm>
           <a:prstGeom prst="rect">
             <a:avLst/>
@@ -3131,7 +4059,7 @@
                 </a:solidFill>
                 <a:latin typeface="Arial"/>
               </a:rPr>
-              <a:t>カルバリの丘の  十字架の上で</a:t>
+              <a:t>3 日目の    夜明けに 神の子   イエス  は</a:t>
             </a:r>
           </a:p>
         </p:txBody>
@@ -3144,8 +4072,8 @@
         </p:nvSpPr>
         <p:spPr>
           <a:xfrm>
-            <a:off x="594360" y="2560320"/>
-            <a:ext cx="11002975" cy="384048"/>
+            <a:off x="640080" y="3268980"/>
+            <a:ext cx="10911535" cy="365760"/>
           </a:xfrm>
           <a:prstGeom prst="rect">
             <a:avLst/>
@@ -3162,11 +4090,11 @@
             <a:r>
               <a:rPr sz="2400" b="0" i="1">
                 <a:solidFill>
-                  <a:srgbClr val="B4B4B4"/>
-                </a:solidFill>
-                <a:latin typeface="Arial"/>
-              </a:rPr>
-              <a:t>karubari no oka no juujika no ue de</a:t>
+                  <a:srgbClr val="AAAAAA"/>
+                </a:solidFill>
+                <a:latin typeface="Arial"/>
+              </a:rPr>
+              <a:t>3  nichime no yoake ni kaminoko iesu ha</a:t>
             </a:r>
           </a:p>
         </p:txBody>
@@ -3179,8 +4107,8 @@
         </p:nvSpPr>
         <p:spPr>
           <a:xfrm>
-            <a:off x="594360" y="2980944"/>
-            <a:ext cx="11002975" cy="347472"/>
+            <a:off x="640080" y="4046220"/>
+            <a:ext cx="10911535" cy="310896"/>
           </a:xfrm>
           <a:prstGeom prst="rect">
             <a:avLst/>
@@ -3197,112 +4125,68 @@
             <a:r>
               <a:rPr sz="2000" b="0" i="1">
                 <a:solidFill>
-                  <a:srgbClr val="8C8C8C"/>
-                </a:solidFill>
-                <a:latin typeface="Arial"/>
-              </a:rPr>
-              <a:t/>
-            </a:r>
-          </a:p>
-        </p:txBody>
-      </p:sp>
-      <p:sp>
-        <p:nvSpPr>
-          <p:cNvPr id="5" name="TextBox 4"/>
-          <p:cNvSpPr txBox="1"/>
-          <p:nvPr/>
-        </p:nvSpPr>
-        <p:spPr>
-          <a:xfrm>
-            <a:off x="594360" y="3529584"/>
-            <a:ext cx="11002975" cy="685800"/>
-          </a:xfrm>
-          <a:prstGeom prst="rect">
-            <a:avLst/>
-          </a:prstGeom>
-          <a:noFill/>
-        </p:spPr>
-        <p:txBody>
-          <a:bodyPr wrap="square">
-            <a:spAutoFit/>
-          </a:bodyPr>
-          <a:lstStyle/>
-          <a:p>
-            <a:pPr algn="ctr"/>
-            <a:r>
-              <a:rPr sz="4400" b="1" i="0">
+                  <a:srgbClr val="828282"/>
+                </a:solidFill>
+                <a:latin typeface="Arial"/>
+              </a:rPr>
+              <a:t>Para o calvário olharei</a:t>
+            </a:r>
+          </a:p>
+        </p:txBody>
+      </p:sp>
+    </p:spTree>
+  </p:cSld>
+  <p:clrMapOvr>
+    <a:masterClrMapping/>
+  </p:clrMapOvr>
+</p:sld>
+</file>
+
+<file path=ppt/slides/slide19.xml><?xml version="1.0" encoding="utf-8"?>
+<p:sld xmlns:a="http://schemas.openxmlformats.org/drawingml/2006/main" xmlns:p="http://schemas.openxmlformats.org/presentationml/2006/main" xmlns:r="http://schemas.openxmlformats.org/officeDocument/2006/relationships">
+  <p:cSld>
+    <p:bg>
+      <p:bgPr>
+        <a:solidFill>
+          <a:srgbClr val="000000"/>
+        </a:solidFill>
+        <a:effectLst/>
+      </p:bgPr>
+    </p:bg>
+    <p:spTree>
+      <p:nvGrpSpPr>
+        <p:cNvPr id="1" name=""/>
+        <p:cNvGrpSpPr/>
+        <p:nvPr/>
+      </p:nvGrpSpPr>
+      <p:grpSpPr/>
+      <p:sp>
+        <p:nvSpPr>
+          <p:cNvPr id="2" name="TextBox 1"/>
+          <p:cNvSpPr txBox="1"/>
+          <p:nvPr/>
+        </p:nvSpPr>
+        <p:spPr>
+          <a:xfrm>
+            <a:off x="640080" y="2702052"/>
+            <a:ext cx="10911535" cy="731520"/>
+          </a:xfrm>
+          <a:prstGeom prst="rect">
+            <a:avLst/>
+          </a:prstGeom>
+          <a:noFill/>
+        </p:spPr>
+        <p:txBody>
+          <a:bodyPr wrap="square">
+            <a:spAutoFit/>
+          </a:bodyPr>
+          <a:lstStyle/>
+          <a:p>
+            <a:pPr algn="ctr"/>
+            <a:r>
+              <a:rPr sz="4800" b="1" i="0">
                 <a:solidFill>
                   <a:srgbClr val="FFFFFF"/>
-                </a:solidFill>
-                <a:latin typeface="Arial"/>
-              </a:rPr>
-              <a:t>傷つき死なれた  私の救い</a:t>
-            </a:r>
-          </a:p>
-        </p:txBody>
-      </p:sp>
-      <p:sp>
-        <p:nvSpPr>
-          <p:cNvPr id="6" name="TextBox 5"/>
-          <p:cNvSpPr txBox="1"/>
-          <p:nvPr/>
-        </p:nvSpPr>
-        <p:spPr>
-          <a:xfrm>
-            <a:off x="594360" y="4251960"/>
-            <a:ext cx="11002975" cy="384048"/>
-          </a:xfrm>
-          <a:prstGeom prst="rect">
-            <a:avLst/>
-          </a:prstGeom>
-          <a:noFill/>
-        </p:spPr>
-        <p:txBody>
-          <a:bodyPr wrap="square">
-            <a:spAutoFit/>
-          </a:bodyPr>
-          <a:lstStyle/>
-          <a:p>
-            <a:pPr algn="ctr"/>
-            <a:r>
-              <a:rPr sz="2400" b="0" i="1">
-                <a:solidFill>
-                  <a:srgbClr val="B4B4B4"/>
-                </a:solidFill>
-                <a:latin typeface="Arial"/>
-              </a:rPr>
-              <a:t>kizu tsuki shinareta watashi no sukui</a:t>
-            </a:r>
-          </a:p>
-        </p:txBody>
-      </p:sp>
-      <p:sp>
-        <p:nvSpPr>
-          <p:cNvPr id="7" name="TextBox 6"/>
-          <p:cNvSpPr txBox="1"/>
-          <p:nvPr/>
-        </p:nvSpPr>
-        <p:spPr>
-          <a:xfrm>
-            <a:off x="594360" y="4672584"/>
-            <a:ext cx="11002975" cy="347472"/>
-          </a:xfrm>
-          <a:prstGeom prst="rect">
-            <a:avLst/>
-          </a:prstGeom>
-          <a:noFill/>
-        </p:spPr>
-        <p:txBody>
-          <a:bodyPr wrap="square">
-            <a:spAutoFit/>
-          </a:bodyPr>
-          <a:lstStyle/>
-          <a:p>
-            <a:pPr algn="ctr"/>
-            <a:r>
-              <a:rPr sz="2000" b="0" i="1">
-                <a:solidFill>
-                  <a:srgbClr val="8C8C8C"/>
                 </a:solidFill>
                 <a:latin typeface="Arial"/>
               </a:rPr>
@@ -3345,29 +4229,90 @@
         </p:nvSpPr>
         <p:spPr>
           <a:xfrm>
-            <a:off x="594360" y="1837944"/>
-            <a:ext cx="11002975" cy="685800"/>
-          </a:xfrm>
-          <a:prstGeom prst="rect">
-            <a:avLst/>
-          </a:prstGeom>
-          <a:noFill/>
-        </p:spPr>
-        <p:txBody>
-          <a:bodyPr wrap="square">
-            <a:spAutoFit/>
-          </a:bodyPr>
-          <a:lstStyle/>
-          <a:p>
-            <a:pPr algn="ctr"/>
-            <a:r>
-              <a:rPr sz="4400" b="1" i="0">
+            <a:off x="640080" y="2702052"/>
+            <a:ext cx="10911535" cy="731520"/>
+          </a:xfrm>
+          <a:prstGeom prst="rect">
+            <a:avLst/>
+          </a:prstGeom>
+          <a:noFill/>
+        </p:spPr>
+        <p:txBody>
+          <a:bodyPr wrap="square">
+            <a:spAutoFit/>
+          </a:bodyPr>
+          <a:lstStyle/>
+          <a:p>
+            <a:pPr algn="ctr"/>
+            <a:r>
+              <a:rPr sz="4800" b="1" i="0">
                 <a:solidFill>
                   <a:srgbClr val="FFFFFF"/>
                 </a:solidFill>
                 <a:latin typeface="Arial"/>
               </a:rPr>
-              <a:t>亜麻布に巻かれ  ヨセフの墓へと</a:t>
+              <a:t>Para o calvário olharei</a:t>
+            </a:r>
+          </a:p>
+        </p:txBody>
+      </p:sp>
+    </p:spTree>
+  </p:cSld>
+  <p:clrMapOvr>
+    <a:masterClrMapping/>
+  </p:clrMapOvr>
+</p:sld>
+</file>
+
+<file path=ppt/slides/slide20.xml><?xml version="1.0" encoding="utf-8"?>
+<p:sld xmlns:a="http://schemas.openxmlformats.org/drawingml/2006/main" xmlns:p="http://schemas.openxmlformats.org/presentationml/2006/main" xmlns:r="http://schemas.openxmlformats.org/officeDocument/2006/relationships">
+  <p:cSld>
+    <p:bg>
+      <p:bgPr>
+        <a:solidFill>
+          <a:srgbClr val="000000"/>
+        </a:solidFill>
+        <a:effectLst/>
+      </p:bgPr>
+    </p:bg>
+    <p:spTree>
+      <p:nvGrpSpPr>
+        <p:cNvPr id="1" name=""/>
+        <p:cNvGrpSpPr/>
+        <p:nvPr/>
+      </p:nvGrpSpPr>
+      <p:grpSpPr/>
+      <p:sp>
+        <p:nvSpPr>
+          <p:cNvPr id="2" name="TextBox 1"/>
+          <p:cNvSpPr txBox="1"/>
+          <p:nvPr/>
+        </p:nvSpPr>
+        <p:spPr>
+          <a:xfrm>
+            <a:off x="640080" y="2500884"/>
+            <a:ext cx="10911535" cy="731520"/>
+          </a:xfrm>
+          <a:prstGeom prst="rect">
+            <a:avLst/>
+          </a:prstGeom>
+          <a:noFill/>
+        </p:spPr>
+        <p:txBody>
+          <a:bodyPr wrap="square">
+            <a:spAutoFit/>
+          </a:bodyPr>
+          <a:lstStyle/>
+          <a:p>
+            <a:pPr algn="ctr"/>
+            <a:r>
+              <a:rPr sz="4800" b="1" i="0">
+                <a:solidFill>
+                  <a:srgbClr val="FFFFFF"/>
+                </a:solidFill>
+                <a:latin typeface="Arial"/>
+              </a:rPr>
+              <a:t>死を打ち砕い  て よみがえられ-た</a:t>
             </a:r>
           </a:p>
         </p:txBody>
@@ -3380,8 +4325,8 @@
         </p:nvSpPr>
         <p:spPr>
           <a:xfrm>
-            <a:off x="594360" y="2560320"/>
-            <a:ext cx="11002975" cy="384048"/>
+            <a:off x="640080" y="3268980"/>
+            <a:ext cx="10911535" cy="365760"/>
           </a:xfrm>
           <a:prstGeom prst="rect">
             <a:avLst/>
@@ -3398,11 +4343,11 @@
             <a:r>
               <a:rPr sz="2400" b="0" i="1">
                 <a:solidFill>
-                  <a:srgbClr val="B4B4B4"/>
-                </a:solidFill>
-                <a:latin typeface="Arial"/>
-              </a:rPr>
-              <a:t>amanuno ni makare  yosefu no haka he to</a:t>
+                  <a:srgbClr val="AAAAAA"/>
+                </a:solidFill>
+                <a:latin typeface="Arial"/>
+              </a:rPr>
+              <a:t>shi wo uchi kudai te yomigaerare - ta</a:t>
             </a:r>
           </a:p>
         </p:txBody>
@@ -3415,8 +4360,8 @@
         </p:nvSpPr>
         <p:spPr>
           <a:xfrm>
-            <a:off x="594360" y="2980944"/>
-            <a:ext cx="11002975" cy="347472"/>
+            <a:off x="640080" y="4046220"/>
+            <a:ext cx="10911535" cy="310896"/>
           </a:xfrm>
           <a:prstGeom prst="rect">
             <a:avLst/>
@@ -3433,7 +4378,68 @@
             <a:r>
               <a:rPr sz="2000" b="0" i="1">
                 <a:solidFill>
-                  <a:srgbClr val="8C8C8C"/>
+                  <a:srgbClr val="828282"/>
+                </a:solidFill>
+                <a:latin typeface="Arial"/>
+              </a:rPr>
+              <a:t>Para o calvário olharei</a:t>
+            </a:r>
+          </a:p>
+        </p:txBody>
+      </p:sp>
+    </p:spTree>
+  </p:cSld>
+  <p:clrMapOvr>
+    <a:masterClrMapping/>
+  </p:clrMapOvr>
+</p:sld>
+</file>
+
+<file path=ppt/slides/slide21.xml><?xml version="1.0" encoding="utf-8"?>
+<p:sld xmlns:a="http://schemas.openxmlformats.org/drawingml/2006/main" xmlns:p="http://schemas.openxmlformats.org/presentationml/2006/main" xmlns:r="http://schemas.openxmlformats.org/officeDocument/2006/relationships">
+  <p:cSld>
+    <p:bg>
+      <p:bgPr>
+        <a:solidFill>
+          <a:srgbClr val="000000"/>
+        </a:solidFill>
+        <a:effectLst/>
+      </p:bgPr>
+    </p:bg>
+    <p:spTree>
+      <p:nvGrpSpPr>
+        <p:cNvPr id="1" name=""/>
+        <p:cNvGrpSpPr/>
+        <p:nvPr/>
+      </p:nvGrpSpPr>
+      <p:grpSpPr/>
+      <p:sp>
+        <p:nvSpPr>
+          <p:cNvPr id="2" name="TextBox 1"/>
+          <p:cNvSpPr txBox="1"/>
+          <p:nvPr/>
+        </p:nvSpPr>
+        <p:spPr>
+          <a:xfrm>
+            <a:off x="640080" y="2052828"/>
+            <a:ext cx="10911535" cy="731520"/>
+          </a:xfrm>
+          <a:prstGeom prst="rect">
+            <a:avLst/>
+          </a:prstGeom>
+          <a:noFill/>
+        </p:spPr>
+        <p:txBody>
+          <a:bodyPr wrap="square">
+            <a:spAutoFit/>
+          </a:bodyPr>
+          <a:lstStyle/>
+          <a:p>
+            <a:pPr algn="ctr"/>
+            <a:r>
+              <a:rPr sz="4800" b="1" i="0">
+                <a:solidFill>
+                  <a:srgbClr val="FFFFFF"/>
                 </a:solidFill>
                 <a:latin typeface="Arial"/>
               </a:rPr>
@@ -3444,49 +4450,110 @@
       </p:sp>
       <p:sp>
         <p:nvSpPr>
-          <p:cNvPr id="5" name="TextBox 4"/>
-          <p:cNvSpPr txBox="1"/>
-          <p:nvPr/>
-        </p:nvSpPr>
-        <p:spPr>
-          <a:xfrm>
-            <a:off x="594360" y="3529584"/>
-            <a:ext cx="11002975" cy="685800"/>
-          </a:xfrm>
-          <a:prstGeom prst="rect">
-            <a:avLst/>
-          </a:prstGeom>
-          <a:noFill/>
-        </p:spPr>
-        <p:txBody>
-          <a:bodyPr wrap="square">
-            <a:spAutoFit/>
-          </a:bodyPr>
-          <a:lstStyle/>
-          <a:p>
-            <a:pPr algn="ctr"/>
-            <a:r>
-              <a:rPr sz="4400" b="1" i="0">
+          <p:cNvPr id="3" name="TextBox 2"/>
+          <p:cNvSpPr txBox="1"/>
+          <p:nvPr/>
+        </p:nvSpPr>
+        <p:spPr>
+          <a:xfrm>
+            <a:off x="640080" y="2985516"/>
+            <a:ext cx="10911535" cy="731520"/>
+          </a:xfrm>
+          <a:prstGeom prst="rect">
+            <a:avLst/>
+          </a:prstGeom>
+          <a:noFill/>
+        </p:spPr>
+        <p:txBody>
+          <a:bodyPr wrap="square">
+            <a:spAutoFit/>
+          </a:bodyPr>
+          <a:lstStyle/>
+          <a:p>
+            <a:pPr algn="ctr"/>
+            <a:r>
+              <a:rPr sz="4800" b="1" i="0">
                 <a:solidFill>
                   <a:srgbClr val="FFFFFF"/>
                 </a:solidFill>
                 <a:latin typeface="Arial"/>
               </a:rPr>
-              <a:t>出口は閉ざされ 一人葬られた</a:t>
-            </a:r>
-          </a:p>
-        </p:txBody>
-      </p:sp>
-      <p:sp>
-        <p:nvSpPr>
-          <p:cNvPr id="6" name="TextBox 5"/>
-          <p:cNvSpPr txBox="1"/>
-          <p:nvPr/>
-        </p:nvSpPr>
-        <p:spPr>
-          <a:xfrm>
-            <a:off x="594360" y="4251960"/>
-            <a:ext cx="11002975" cy="384048"/>
+              <a:t/>
+            </a:r>
+          </a:p>
+        </p:txBody>
+      </p:sp>
+    </p:spTree>
+  </p:cSld>
+  <p:clrMapOvr>
+    <a:masterClrMapping/>
+  </p:clrMapOvr>
+</p:sld>
+</file>
+
+<file path=ppt/slides/slide22.xml><?xml version="1.0" encoding="utf-8"?>
+<p:sld xmlns:a="http://schemas.openxmlformats.org/drawingml/2006/main" xmlns:p="http://schemas.openxmlformats.org/presentationml/2006/main" xmlns:r="http://schemas.openxmlformats.org/officeDocument/2006/relationships">
+  <p:cSld>
+    <p:bg>
+      <p:bgPr>
+        <a:solidFill>
+          <a:srgbClr val="000000"/>
+        </a:solidFill>
+        <a:effectLst/>
+      </p:bgPr>
+    </p:bg>
+    <p:spTree>
+      <p:nvGrpSpPr>
+        <p:cNvPr id="1" name=""/>
+        <p:cNvGrpSpPr/>
+        <p:nvPr/>
+      </p:nvGrpSpPr>
+      <p:grpSpPr/>
+      <p:sp>
+        <p:nvSpPr>
+          <p:cNvPr id="2" name="TextBox 1"/>
+          <p:cNvSpPr txBox="1"/>
+          <p:nvPr/>
+        </p:nvSpPr>
+        <p:spPr>
+          <a:xfrm>
+            <a:off x="640080" y="2500884"/>
+            <a:ext cx="10911535" cy="731520"/>
+          </a:xfrm>
+          <a:prstGeom prst="rect">
+            <a:avLst/>
+          </a:prstGeom>
+          <a:noFill/>
+        </p:spPr>
+        <p:txBody>
+          <a:bodyPr wrap="square">
+            <a:spAutoFit/>
+          </a:bodyPr>
+          <a:lstStyle/>
+          <a:p>
+            <a:pPr algn="ctr"/>
+            <a:r>
+              <a:rPr sz="4800" b="1" i="0">
+                <a:solidFill>
+                  <a:srgbClr val="FFFFFF"/>
+                </a:solidFill>
+                <a:latin typeface="Arial"/>
+              </a:rPr>
+              <a:t>たたえよう神の名を 主の名を永えんに</a:t>
+            </a:r>
+          </a:p>
+        </p:txBody>
+      </p:sp>
+      <p:sp>
+        <p:nvSpPr>
+          <p:cNvPr id="3" name="TextBox 2"/>
+          <p:cNvSpPr txBox="1"/>
+          <p:nvPr/>
+        </p:nvSpPr>
+        <p:spPr>
+          <a:xfrm>
+            <a:off x="640080" y="3268980"/>
+            <a:ext cx="10911535" cy="365760"/>
           </a:xfrm>
           <a:prstGeom prst="rect">
             <a:avLst/>
@@ -3503,25 +4570,25 @@
             <a:r>
               <a:rPr sz="2400" b="0" i="1">
                 <a:solidFill>
-                  <a:srgbClr val="B4B4B4"/>
-                </a:solidFill>
-                <a:latin typeface="Arial"/>
-              </a:rPr>
-              <a:t>deguchi wa tozasare  hitori houmurareta</a:t>
-            </a:r>
-          </a:p>
-        </p:txBody>
-      </p:sp>
-      <p:sp>
-        <p:nvSpPr>
-          <p:cNvPr id="7" name="TextBox 6"/>
-          <p:cNvSpPr txBox="1"/>
-          <p:nvPr/>
-        </p:nvSpPr>
-        <p:spPr>
-          <a:xfrm>
-            <a:off x="594360" y="4672584"/>
-            <a:ext cx="11002975" cy="347472"/>
+                  <a:srgbClr val="AAAAAA"/>
+                </a:solidFill>
+                <a:latin typeface="Arial"/>
+              </a:rPr>
+              <a:t>tataeyou kami no mei wo omono mei wo ei enni</a:t>
+            </a:r>
+          </a:p>
+        </p:txBody>
+      </p:sp>
+      <p:sp>
+        <p:nvSpPr>
+          <p:cNvPr id="4" name="TextBox 3"/>
+          <p:cNvSpPr txBox="1"/>
+          <p:nvPr/>
+        </p:nvSpPr>
+        <p:spPr>
+          <a:xfrm>
+            <a:off x="640080" y="4046220"/>
+            <a:ext cx="10911535" cy="310896"/>
           </a:xfrm>
           <a:prstGeom prst="rect">
             <a:avLst/>
@@ -3538,7 +4605,679 @@
             <a:r>
               <a:rPr sz="2000" b="0" i="1">
                 <a:solidFill>
-                  <a:srgbClr val="8C8C8C"/>
+                  <a:srgbClr val="828282"/>
+                </a:solidFill>
+                <a:latin typeface="Arial"/>
+              </a:rPr>
+              <a:t>Para o calvário olharei</a:t>
+            </a:r>
+          </a:p>
+        </p:txBody>
+      </p:sp>
+    </p:spTree>
+  </p:cSld>
+  <p:clrMapOvr>
+    <a:masterClrMapping/>
+  </p:clrMapOvr>
+</p:sld>
+</file>
+
+<file path=ppt/slides/slide23.xml><?xml version="1.0" encoding="utf-8"?>
+<p:sld xmlns:a="http://schemas.openxmlformats.org/drawingml/2006/main" xmlns:p="http://schemas.openxmlformats.org/presentationml/2006/main" xmlns:r="http://schemas.openxmlformats.org/officeDocument/2006/relationships">
+  <p:cSld>
+    <p:bg>
+      <p:bgPr>
+        <a:solidFill>
+          <a:srgbClr val="000000"/>
+        </a:solidFill>
+        <a:effectLst/>
+      </p:bgPr>
+    </p:bg>
+    <p:spTree>
+      <p:nvGrpSpPr>
+        <p:cNvPr id="1" name=""/>
+        <p:cNvGrpSpPr/>
+        <p:nvPr/>
+      </p:nvGrpSpPr>
+      <p:grpSpPr/>
+      <p:sp>
+        <p:nvSpPr>
+          <p:cNvPr id="2" name="TextBox 1"/>
+          <p:cNvSpPr txBox="1"/>
+          <p:nvPr/>
+        </p:nvSpPr>
+        <p:spPr>
+          <a:xfrm>
+            <a:off x="640080" y="2702052"/>
+            <a:ext cx="10911535" cy="731520"/>
+          </a:xfrm>
+          <a:prstGeom prst="rect">
+            <a:avLst/>
+          </a:prstGeom>
+          <a:noFill/>
+        </p:spPr>
+        <p:txBody>
+          <a:bodyPr wrap="square">
+            <a:spAutoFit/>
+          </a:bodyPr>
+          <a:lstStyle/>
+          <a:p>
+            <a:pPr algn="ctr"/>
+            <a:r>
+              <a:rPr sz="4800" b="1" i="0">
+                <a:solidFill>
+                  <a:srgbClr val="FFFFFF"/>
+                </a:solidFill>
+                <a:latin typeface="Arial"/>
+              </a:rPr>
+              <a:t/>
+            </a:r>
+          </a:p>
+        </p:txBody>
+      </p:sp>
+    </p:spTree>
+  </p:cSld>
+  <p:clrMapOvr>
+    <a:masterClrMapping/>
+  </p:clrMapOvr>
+</p:sld>
+</file>
+
+<file path=ppt/slides/slide24.xml><?xml version="1.0" encoding="utf-8"?>
+<p:sld xmlns:a="http://schemas.openxmlformats.org/drawingml/2006/main" xmlns:p="http://schemas.openxmlformats.org/presentationml/2006/main" xmlns:r="http://schemas.openxmlformats.org/officeDocument/2006/relationships">
+  <p:cSld>
+    <p:bg>
+      <p:bgPr>
+        <a:solidFill>
+          <a:srgbClr val="000000"/>
+        </a:solidFill>
+        <a:effectLst/>
+      </p:bgPr>
+    </p:bg>
+    <p:spTree>
+      <p:nvGrpSpPr>
+        <p:cNvPr id="1" name=""/>
+        <p:cNvGrpSpPr/>
+        <p:nvPr/>
+      </p:nvGrpSpPr>
+      <p:grpSpPr/>
+      <p:sp>
+        <p:nvSpPr>
+          <p:cNvPr id="2" name="TextBox 1"/>
+          <p:cNvSpPr txBox="1"/>
+          <p:nvPr/>
+        </p:nvSpPr>
+        <p:spPr>
+          <a:xfrm>
+            <a:off x="640080" y="2500884"/>
+            <a:ext cx="10911535" cy="731520"/>
+          </a:xfrm>
+          <a:prstGeom prst="rect">
+            <a:avLst/>
+          </a:prstGeom>
+          <a:noFill/>
+        </p:spPr>
+        <p:txBody>
+          <a:bodyPr wrap="square">
+            <a:spAutoFit/>
+          </a:bodyPr>
+          <a:lstStyle/>
+          <a:p>
+            <a:pPr algn="ctr"/>
+            <a:r>
+              <a:rPr sz="4800" b="1" i="0">
+                <a:solidFill>
+                  <a:srgbClr val="FFFFFF"/>
+                </a:solidFill>
+                <a:latin typeface="Arial"/>
+              </a:rPr>
+              <a:t>たたえよう いつまでも</a:t>
+            </a:r>
+          </a:p>
+        </p:txBody>
+      </p:sp>
+      <p:sp>
+        <p:nvSpPr>
+          <p:cNvPr id="3" name="TextBox 2"/>
+          <p:cNvSpPr txBox="1"/>
+          <p:nvPr/>
+        </p:nvSpPr>
+        <p:spPr>
+          <a:xfrm>
+            <a:off x="640080" y="3268980"/>
+            <a:ext cx="10911535" cy="365760"/>
+          </a:xfrm>
+          <a:prstGeom prst="rect">
+            <a:avLst/>
+          </a:prstGeom>
+          <a:noFill/>
+        </p:spPr>
+        <p:txBody>
+          <a:bodyPr wrap="square">
+            <a:spAutoFit/>
+          </a:bodyPr>
+          <a:lstStyle/>
+          <a:p>
+            <a:pPr algn="ctr"/>
+            <a:r>
+              <a:rPr sz="2400" b="0" i="1">
+                <a:solidFill>
+                  <a:srgbClr val="AAAAAA"/>
+                </a:solidFill>
+                <a:latin typeface="Arial"/>
+              </a:rPr>
+              <a:t>tataeyou itsumademo</a:t>
+            </a:r>
+          </a:p>
+        </p:txBody>
+      </p:sp>
+      <p:sp>
+        <p:nvSpPr>
+          <p:cNvPr id="4" name="TextBox 3"/>
+          <p:cNvSpPr txBox="1"/>
+          <p:nvPr/>
+        </p:nvSpPr>
+        <p:spPr>
+          <a:xfrm>
+            <a:off x="640080" y="4046220"/>
+            <a:ext cx="10911535" cy="310896"/>
+          </a:xfrm>
+          <a:prstGeom prst="rect">
+            <a:avLst/>
+          </a:prstGeom>
+          <a:noFill/>
+        </p:spPr>
+        <p:txBody>
+          <a:bodyPr wrap="square">
+            <a:spAutoFit/>
+          </a:bodyPr>
+          <a:lstStyle/>
+          <a:p>
+            <a:pPr algn="ctr"/>
+            <a:r>
+              <a:rPr sz="2000" b="0" i="1">
+                <a:solidFill>
+                  <a:srgbClr val="828282"/>
+                </a:solidFill>
+                <a:latin typeface="Arial"/>
+              </a:rPr>
+              <a:t>Para o calvário olharei</a:t>
+            </a:r>
+          </a:p>
+        </p:txBody>
+      </p:sp>
+    </p:spTree>
+  </p:cSld>
+  <p:clrMapOvr>
+    <a:masterClrMapping/>
+  </p:clrMapOvr>
+</p:sld>
+</file>
+
+<file path=ppt/slides/slide25.xml><?xml version="1.0" encoding="utf-8"?>
+<p:sld xmlns:a="http://schemas.openxmlformats.org/drawingml/2006/main" xmlns:p="http://schemas.openxmlformats.org/presentationml/2006/main" xmlns:r="http://schemas.openxmlformats.org/officeDocument/2006/relationships">
+  <p:cSld>
+    <p:bg>
+      <p:bgPr>
+        <a:solidFill>
+          <a:srgbClr val="000000"/>
+        </a:solidFill>
+        <a:effectLst/>
+      </p:bgPr>
+    </p:bg>
+    <p:spTree>
+      <p:nvGrpSpPr>
+        <p:cNvPr id="1" name=""/>
+        <p:cNvGrpSpPr/>
+        <p:nvPr/>
+      </p:nvGrpSpPr>
+      <p:grpSpPr/>
+      <p:sp>
+        <p:nvSpPr>
+          <p:cNvPr id="2" name="TextBox 1"/>
+          <p:cNvSpPr txBox="1"/>
+          <p:nvPr/>
+        </p:nvSpPr>
+        <p:spPr>
+          <a:xfrm>
+            <a:off x="640080" y="2702052"/>
+            <a:ext cx="10911535" cy="731520"/>
+          </a:xfrm>
+          <a:prstGeom prst="rect">
+            <a:avLst/>
+          </a:prstGeom>
+          <a:noFill/>
+        </p:spPr>
+        <p:txBody>
+          <a:bodyPr wrap="square">
+            <a:spAutoFit/>
+          </a:bodyPr>
+          <a:lstStyle/>
+          <a:p>
+            <a:pPr algn="ctr"/>
+            <a:r>
+              <a:rPr sz="4800" b="1" i="0">
+                <a:solidFill>
+                  <a:srgbClr val="FFFFFF"/>
+                </a:solidFill>
+                <a:latin typeface="Arial"/>
+              </a:rPr>
+              <a:t/>
+            </a:r>
+          </a:p>
+        </p:txBody>
+      </p:sp>
+    </p:spTree>
+  </p:cSld>
+  <p:clrMapOvr>
+    <a:masterClrMapping/>
+  </p:clrMapOvr>
+</p:sld>
+</file>
+
+<file path=ppt/slides/slide26.xml><?xml version="1.0" encoding="utf-8"?>
+<p:sld xmlns:a="http://schemas.openxmlformats.org/drawingml/2006/main" xmlns:p="http://schemas.openxmlformats.org/presentationml/2006/main" xmlns:r="http://schemas.openxmlformats.org/officeDocument/2006/relationships">
+  <p:cSld>
+    <p:bg>
+      <p:bgPr>
+        <a:solidFill>
+          <a:srgbClr val="000000"/>
+        </a:solidFill>
+        <a:effectLst/>
+      </p:bgPr>
+    </p:bg>
+    <p:spTree>
+      <p:nvGrpSpPr>
+        <p:cNvPr id="1" name=""/>
+        <p:cNvGrpSpPr/>
+        <p:nvPr/>
+      </p:nvGrpSpPr>
+      <p:grpSpPr/>
+      <p:sp>
+        <p:nvSpPr>
+          <p:cNvPr id="2" name="TextBox 1"/>
+          <p:cNvSpPr txBox="1"/>
+          <p:nvPr/>
+        </p:nvSpPr>
+        <p:spPr>
+          <a:xfrm>
+            <a:off x="640080" y="2500884"/>
+            <a:ext cx="10911535" cy="731520"/>
+          </a:xfrm>
+          <a:prstGeom prst="rect">
+            <a:avLst/>
+          </a:prstGeom>
+          <a:noFill/>
+        </p:spPr>
+        <p:txBody>
+          <a:bodyPr wrap="square">
+            <a:spAutoFit/>
+          </a:bodyPr>
+          <a:lstStyle/>
+          <a:p>
+            <a:pPr algn="ctr"/>
+            <a:r>
+              <a:rPr sz="4800" b="1" i="0">
+                <a:solidFill>
+                  <a:srgbClr val="FFFFFF"/>
+                </a:solidFill>
+                <a:latin typeface="Arial"/>
+              </a:rPr>
+              <a:t>イエスあなたを</a:t>
+            </a:r>
+          </a:p>
+        </p:txBody>
+      </p:sp>
+      <p:sp>
+        <p:nvSpPr>
+          <p:cNvPr id="3" name="TextBox 2"/>
+          <p:cNvSpPr txBox="1"/>
+          <p:nvPr/>
+        </p:nvSpPr>
+        <p:spPr>
+          <a:xfrm>
+            <a:off x="640080" y="3268980"/>
+            <a:ext cx="10911535" cy="365760"/>
+          </a:xfrm>
+          <a:prstGeom prst="rect">
+            <a:avLst/>
+          </a:prstGeom>
+          <a:noFill/>
+        </p:spPr>
+        <p:txBody>
+          <a:bodyPr wrap="square">
+            <a:spAutoFit/>
+          </a:bodyPr>
+          <a:lstStyle/>
+          <a:p>
+            <a:pPr algn="ctr"/>
+            <a:r>
+              <a:rPr sz="2400" b="0" i="1">
+                <a:solidFill>
+                  <a:srgbClr val="AAAAAA"/>
+                </a:solidFill>
+                <a:latin typeface="Arial"/>
+              </a:rPr>
+              <a:t>iesu anatawo</a:t>
+            </a:r>
+          </a:p>
+        </p:txBody>
+      </p:sp>
+      <p:sp>
+        <p:nvSpPr>
+          <p:cNvPr id="4" name="TextBox 3"/>
+          <p:cNvSpPr txBox="1"/>
+          <p:nvPr/>
+        </p:nvSpPr>
+        <p:spPr>
+          <a:xfrm>
+            <a:off x="640080" y="4046220"/>
+            <a:ext cx="10911535" cy="310896"/>
+          </a:xfrm>
+          <a:prstGeom prst="rect">
+            <a:avLst/>
+          </a:prstGeom>
+          <a:noFill/>
+        </p:spPr>
+        <p:txBody>
+          <a:bodyPr wrap="square">
+            <a:spAutoFit/>
+          </a:bodyPr>
+          <a:lstStyle/>
+          <a:p>
+            <a:pPr algn="ctr"/>
+            <a:r>
+              <a:rPr sz="2000" b="0" i="1">
+                <a:solidFill>
+                  <a:srgbClr val="828282"/>
+                </a:solidFill>
+                <a:latin typeface="Arial"/>
+              </a:rPr>
+              <a:t>Para o calvário olharei</a:t>
+            </a:r>
+          </a:p>
+        </p:txBody>
+      </p:sp>
+    </p:spTree>
+  </p:cSld>
+  <p:clrMapOvr>
+    <a:masterClrMapping/>
+  </p:clrMapOvr>
+</p:sld>
+</file>
+
+<file path=ppt/slides/slide27.xml><?xml version="1.0" encoding="utf-8"?>
+<p:sld xmlns:a="http://schemas.openxmlformats.org/drawingml/2006/main" xmlns:p="http://schemas.openxmlformats.org/presentationml/2006/main" xmlns:r="http://schemas.openxmlformats.org/officeDocument/2006/relationships">
+  <p:cSld>
+    <p:bg>
+      <p:bgPr>
+        <a:solidFill>
+          <a:srgbClr val="000000"/>
+        </a:solidFill>
+        <a:effectLst/>
+      </p:bgPr>
+    </p:bg>
+    <p:spTree>
+      <p:nvGrpSpPr>
+        <p:cNvPr id="1" name=""/>
+        <p:cNvGrpSpPr/>
+        <p:nvPr/>
+      </p:nvGrpSpPr>
+      <p:grpSpPr/>
+      <p:sp>
+        <p:nvSpPr>
+          <p:cNvPr id="2" name="TextBox 1"/>
+          <p:cNvSpPr txBox="1"/>
+          <p:nvPr/>
+        </p:nvSpPr>
+        <p:spPr>
+          <a:xfrm>
+            <a:off x="640080" y="2052828"/>
+            <a:ext cx="10911535" cy="731520"/>
+          </a:xfrm>
+          <a:prstGeom prst="rect">
+            <a:avLst/>
+          </a:prstGeom>
+          <a:noFill/>
+        </p:spPr>
+        <p:txBody>
+          <a:bodyPr wrap="square">
+            <a:spAutoFit/>
+          </a:bodyPr>
+          <a:lstStyle/>
+          <a:p>
+            <a:pPr algn="ctr"/>
+            <a:r>
+              <a:rPr sz="4800" b="1" i="0">
+                <a:solidFill>
+                  <a:srgbClr val="FFFFFF"/>
+                </a:solidFill>
+                <a:latin typeface="Arial"/>
+              </a:rPr>
+              <a:t/>
+            </a:r>
+          </a:p>
+        </p:txBody>
+      </p:sp>
+      <p:sp>
+        <p:nvSpPr>
+          <p:cNvPr id="3" name="TextBox 2"/>
+          <p:cNvSpPr txBox="1"/>
+          <p:nvPr/>
+        </p:nvSpPr>
+        <p:spPr>
+          <a:xfrm>
+            <a:off x="640080" y="2985516"/>
+            <a:ext cx="10911535" cy="731520"/>
+          </a:xfrm>
+          <a:prstGeom prst="rect">
+            <a:avLst/>
+          </a:prstGeom>
+          <a:noFill/>
+        </p:spPr>
+        <p:txBody>
+          <a:bodyPr wrap="square">
+            <a:spAutoFit/>
+          </a:bodyPr>
+          <a:lstStyle/>
+          <a:p>
+            <a:pPr algn="ctr"/>
+            <a:r>
+              <a:rPr sz="4800" b="1" i="0">
+                <a:solidFill>
+                  <a:srgbClr val="FFFFFF"/>
+                </a:solidFill>
+                <a:latin typeface="Arial"/>
+              </a:rPr>
+              <a:t/>
+            </a:r>
+          </a:p>
+        </p:txBody>
+      </p:sp>
+    </p:spTree>
+  </p:cSld>
+  <p:clrMapOvr>
+    <a:masterClrMapping/>
+  </p:clrMapOvr>
+</p:sld>
+</file>
+
+<file path=ppt/slides/slide28.xml><?xml version="1.0" encoding="utf-8"?>
+<p:sld xmlns:a="http://schemas.openxmlformats.org/drawingml/2006/main" xmlns:p="http://schemas.openxmlformats.org/presentationml/2006/main" xmlns:r="http://schemas.openxmlformats.org/officeDocument/2006/relationships">
+  <p:cSld>
+    <p:bg>
+      <p:bgPr>
+        <a:solidFill>
+          <a:srgbClr val="000000"/>
+        </a:solidFill>
+        <a:effectLst/>
+      </p:bgPr>
+    </p:bg>
+    <p:spTree>
+      <p:nvGrpSpPr>
+        <p:cNvPr id="1" name=""/>
+        <p:cNvGrpSpPr/>
+        <p:nvPr/>
+      </p:nvGrpSpPr>
+      <p:grpSpPr/>
+      <p:sp>
+        <p:nvSpPr>
+          <p:cNvPr id="2" name="TextBox 1"/>
+          <p:cNvSpPr txBox="1"/>
+          <p:nvPr/>
+        </p:nvSpPr>
+        <p:spPr>
+          <a:xfrm>
+            <a:off x="640080" y="2500884"/>
+            <a:ext cx="10911535" cy="731520"/>
+          </a:xfrm>
+          <a:prstGeom prst="rect">
+            <a:avLst/>
+          </a:prstGeom>
+          <a:noFill/>
+        </p:spPr>
+        <p:txBody>
+          <a:bodyPr wrap="square">
+            <a:spAutoFit/>
+          </a:bodyPr>
+          <a:lstStyle/>
+          <a:p>
+            <a:pPr algn="ctr"/>
+            <a:r>
+              <a:rPr sz="4800" b="1" i="0">
+                <a:solidFill>
+                  <a:srgbClr val="FFFFFF"/>
+                </a:solidFill>
+                <a:latin typeface="Arial"/>
+              </a:rPr>
+              <a:t>栄こうをまとい イエスは来られ-る</a:t>
+            </a:r>
+          </a:p>
+        </p:txBody>
+      </p:sp>
+      <p:sp>
+        <p:nvSpPr>
+          <p:cNvPr id="3" name="TextBox 2"/>
+          <p:cNvSpPr txBox="1"/>
+          <p:nvPr/>
+        </p:nvSpPr>
+        <p:spPr>
+          <a:xfrm>
+            <a:off x="640080" y="3268980"/>
+            <a:ext cx="10911535" cy="365760"/>
+          </a:xfrm>
+          <a:prstGeom prst="rect">
+            <a:avLst/>
+          </a:prstGeom>
+          <a:noFill/>
+        </p:spPr>
+        <p:txBody>
+          <a:bodyPr wrap="square">
+            <a:spAutoFit/>
+          </a:bodyPr>
+          <a:lstStyle/>
+          <a:p>
+            <a:pPr algn="ctr"/>
+            <a:r>
+              <a:rPr sz="2400" b="0" i="1">
+                <a:solidFill>
+                  <a:srgbClr val="AAAAAA"/>
+                </a:solidFill>
+                <a:latin typeface="Arial"/>
+              </a:rPr>
+              <a:t>sakae kouwomatoi iesu ha kora re - ru</a:t>
+            </a:r>
+          </a:p>
+        </p:txBody>
+      </p:sp>
+      <p:sp>
+        <p:nvSpPr>
+          <p:cNvPr id="4" name="TextBox 3"/>
+          <p:cNvSpPr txBox="1"/>
+          <p:nvPr/>
+        </p:nvSpPr>
+        <p:spPr>
+          <a:xfrm>
+            <a:off x="640080" y="4046220"/>
+            <a:ext cx="10911535" cy="310896"/>
+          </a:xfrm>
+          <a:prstGeom prst="rect">
+            <a:avLst/>
+          </a:prstGeom>
+          <a:noFill/>
+        </p:spPr>
+        <p:txBody>
+          <a:bodyPr wrap="square">
+            <a:spAutoFit/>
+          </a:bodyPr>
+          <a:lstStyle/>
+          <a:p>
+            <a:pPr algn="ctr"/>
+            <a:r>
+              <a:rPr sz="2000" b="0" i="1">
+                <a:solidFill>
+                  <a:srgbClr val="828282"/>
+                </a:solidFill>
+                <a:latin typeface="Arial"/>
+              </a:rPr>
+              <a:t>Para o calvário olharei</a:t>
+            </a:r>
+          </a:p>
+        </p:txBody>
+      </p:sp>
+    </p:spTree>
+  </p:cSld>
+  <p:clrMapOvr>
+    <a:masterClrMapping/>
+  </p:clrMapOvr>
+</p:sld>
+</file>
+
+<file path=ppt/slides/slide29.xml><?xml version="1.0" encoding="utf-8"?>
+<p:sld xmlns:a="http://schemas.openxmlformats.org/drawingml/2006/main" xmlns:p="http://schemas.openxmlformats.org/presentationml/2006/main" xmlns:r="http://schemas.openxmlformats.org/officeDocument/2006/relationships">
+  <p:cSld>
+    <p:bg>
+      <p:bgPr>
+        <a:solidFill>
+          <a:srgbClr val="000000"/>
+        </a:solidFill>
+        <a:effectLst/>
+      </p:bgPr>
+    </p:bg>
+    <p:spTree>
+      <p:nvGrpSpPr>
+        <p:cNvPr id="1" name=""/>
+        <p:cNvGrpSpPr/>
+        <p:nvPr/>
+      </p:nvGrpSpPr>
+      <p:grpSpPr/>
+      <p:sp>
+        <p:nvSpPr>
+          <p:cNvPr id="2" name="TextBox 1"/>
+          <p:cNvSpPr txBox="1"/>
+          <p:nvPr/>
+        </p:nvSpPr>
+        <p:spPr>
+          <a:xfrm>
+            <a:off x="640080" y="2702052"/>
+            <a:ext cx="10911535" cy="731520"/>
+          </a:xfrm>
+          <a:prstGeom prst="rect">
+            <a:avLst/>
+          </a:prstGeom>
+          <a:noFill/>
+        </p:spPr>
+        <p:txBody>
+          <a:bodyPr wrap="square">
+            <a:spAutoFit/>
+          </a:bodyPr>
+          <a:lstStyle/>
+          <a:p>
+            <a:pPr algn="ctr"/>
+            <a:r>
+              <a:rPr sz="4800" b="1" i="0">
+                <a:solidFill>
+                  <a:srgbClr val="FFFFFF"/>
                 </a:solidFill>
                 <a:latin typeface="Arial"/>
               </a:rPr>
@@ -3581,29 +5320,29 @@
         </p:nvSpPr>
         <p:spPr>
           <a:xfrm>
-            <a:off x="594360" y="1837944"/>
-            <a:ext cx="11002975" cy="685800"/>
-          </a:xfrm>
-          <a:prstGeom prst="rect">
-            <a:avLst/>
-          </a:prstGeom>
-          <a:noFill/>
-        </p:spPr>
-        <p:txBody>
-          <a:bodyPr wrap="square">
-            <a:spAutoFit/>
-          </a:bodyPr>
-          <a:lstStyle/>
-          <a:p>
-            <a:pPr algn="ctr"/>
-            <a:r>
-              <a:rPr sz="4400" b="1" i="0">
+            <a:off x="640080" y="2500884"/>
+            <a:ext cx="10911535" cy="731520"/>
+          </a:xfrm>
+          <a:prstGeom prst="rect">
+            <a:avLst/>
+          </a:prstGeom>
+          <a:noFill/>
+        </p:spPr>
+        <p:txBody>
+          <a:bodyPr wrap="square">
+            <a:spAutoFit/>
+          </a:bodyPr>
+          <a:lstStyle/>
+          <a:p>
+            <a:pPr algn="ctr"/>
+            <a:r>
+              <a:rPr sz="4600" b="1" i="0">
                 <a:solidFill>
                   <a:srgbClr val="FFFFFF"/>
                 </a:solidFill>
                 <a:latin typeface="Arial"/>
               </a:rPr>
-              <a:t>讃えよう、神の名を</a:t>
+              <a:t>傷つ き   死なれ た わた しの   す-くい</a:t>
             </a:r>
           </a:p>
         </p:txBody>
@@ -3616,8 +5355,8 @@
         </p:nvSpPr>
         <p:spPr>
           <a:xfrm>
-            <a:off x="594360" y="2560320"/>
-            <a:ext cx="11002975" cy="384048"/>
+            <a:off x="640080" y="3268980"/>
+            <a:ext cx="10911535" cy="365760"/>
           </a:xfrm>
           <a:prstGeom prst="rect">
             <a:avLst/>
@@ -3634,11 +5373,11 @@
             <a:r>
               <a:rPr sz="2400" b="0" i="1">
                 <a:solidFill>
-                  <a:srgbClr val="B4B4B4"/>
-                </a:solidFill>
-                <a:latin typeface="Arial"/>
-              </a:rPr>
-              <a:t>tataeyo kami no na wo</a:t>
+                  <a:srgbClr val="AAAAAA"/>
+                </a:solidFill>
+                <a:latin typeface="Arial"/>
+              </a:rPr>
+              <a:t>kizutsu ki shina re ta wata shino su - kui</a:t>
             </a:r>
           </a:p>
         </p:txBody>
@@ -3651,8 +5390,8 @@
         </p:nvSpPr>
         <p:spPr>
           <a:xfrm>
-            <a:off x="594360" y="2980944"/>
-            <a:ext cx="11002975" cy="347472"/>
+            <a:off x="640080" y="4046220"/>
+            <a:ext cx="10911535" cy="310896"/>
           </a:xfrm>
           <a:prstGeom prst="rect">
             <a:avLst/>
@@ -3669,7 +5408,199 @@
             <a:r>
               <a:rPr sz="2000" b="0" i="1">
                 <a:solidFill>
-                  <a:srgbClr val="8C8C8C"/>
+                  <a:srgbClr val="828282"/>
+                </a:solidFill>
+                <a:latin typeface="Arial"/>
+              </a:rPr>
+              <a:t>Para o calvário olharei</a:t>
+            </a:r>
+          </a:p>
+        </p:txBody>
+      </p:sp>
+    </p:spTree>
+  </p:cSld>
+  <p:clrMapOvr>
+    <a:masterClrMapping/>
+  </p:clrMapOvr>
+</p:sld>
+</file>
+
+<file path=ppt/slides/slide30.xml><?xml version="1.0" encoding="utf-8"?>
+<p:sld xmlns:a="http://schemas.openxmlformats.org/drawingml/2006/main" xmlns:p="http://schemas.openxmlformats.org/presentationml/2006/main" xmlns:r="http://schemas.openxmlformats.org/officeDocument/2006/relationships">
+  <p:cSld>
+    <p:bg>
+      <p:bgPr>
+        <a:solidFill>
+          <a:srgbClr val="000000"/>
+        </a:solidFill>
+        <a:effectLst/>
+      </p:bgPr>
+    </p:bg>
+    <p:spTree>
+      <p:nvGrpSpPr>
+        <p:cNvPr id="1" name=""/>
+        <p:cNvGrpSpPr/>
+        <p:nvPr/>
+      </p:nvGrpSpPr>
+      <p:grpSpPr/>
+      <p:sp>
+        <p:nvSpPr>
+          <p:cNvPr id="2" name="TextBox 1"/>
+          <p:cNvSpPr txBox="1"/>
+          <p:nvPr/>
+        </p:nvSpPr>
+        <p:spPr>
+          <a:xfrm>
+            <a:off x="640080" y="2500884"/>
+            <a:ext cx="10911535" cy="731520"/>
+          </a:xfrm>
+          <a:prstGeom prst="rect">
+            <a:avLst/>
+          </a:prstGeom>
+          <a:noFill/>
+        </p:spPr>
+        <p:txBody>
+          <a:bodyPr wrap="square">
+            <a:spAutoFit/>
+          </a:bodyPr>
+          <a:lstStyle/>
+          <a:p>
+            <a:pPr algn="ctr"/>
+            <a:r>
+              <a:rPr sz="3700" b="1" i="0">
+                <a:solidFill>
+                  <a:srgbClr val="FFFFFF"/>
+                </a:solidFill>
+                <a:latin typeface="Arial"/>
+              </a:rPr>
+              <a:t>私は       見るだろう 輝-く         御顔-を</a:t>
+            </a:r>
+          </a:p>
+        </p:txBody>
+      </p:sp>
+      <p:sp>
+        <p:nvSpPr>
+          <p:cNvPr id="3" name="TextBox 2"/>
+          <p:cNvSpPr txBox="1"/>
+          <p:nvPr/>
+        </p:nvSpPr>
+        <p:spPr>
+          <a:xfrm>
+            <a:off x="640080" y="3268980"/>
+            <a:ext cx="10911535" cy="365760"/>
+          </a:xfrm>
+          <a:prstGeom prst="rect">
+            <a:avLst/>
+          </a:prstGeom>
+          <a:noFill/>
+        </p:spPr>
+        <p:txBody>
+          <a:bodyPr wrap="square">
+            <a:spAutoFit/>
+          </a:bodyPr>
+          <a:lstStyle/>
+          <a:p>
+            <a:pPr algn="ctr"/>
+            <a:r>
+              <a:rPr sz="2400" b="0" i="1">
+                <a:solidFill>
+                  <a:srgbClr val="AAAAAA"/>
+                </a:solidFill>
+                <a:latin typeface="Arial"/>
+              </a:rPr>
+              <a:t>watashi ha miru darou teru - ku o kao - wo</a:t>
+            </a:r>
+          </a:p>
+        </p:txBody>
+      </p:sp>
+      <p:sp>
+        <p:nvSpPr>
+          <p:cNvPr id="4" name="TextBox 3"/>
+          <p:cNvSpPr txBox="1"/>
+          <p:nvPr/>
+        </p:nvSpPr>
+        <p:spPr>
+          <a:xfrm>
+            <a:off x="640080" y="4046220"/>
+            <a:ext cx="10911535" cy="310896"/>
+          </a:xfrm>
+          <a:prstGeom prst="rect">
+            <a:avLst/>
+          </a:prstGeom>
+          <a:noFill/>
+        </p:spPr>
+        <p:txBody>
+          <a:bodyPr wrap="square">
+            <a:spAutoFit/>
+          </a:bodyPr>
+          <a:lstStyle/>
+          <a:p>
+            <a:pPr algn="ctr"/>
+            <a:r>
+              <a:rPr sz="2000" b="0" i="1">
+                <a:solidFill>
+                  <a:srgbClr val="828282"/>
+                </a:solidFill>
+                <a:latin typeface="Arial"/>
+              </a:rPr>
+              <a:t>Para o calvário olharei</a:t>
+            </a:r>
+          </a:p>
+        </p:txBody>
+      </p:sp>
+    </p:spTree>
+  </p:cSld>
+  <p:clrMapOvr>
+    <a:masterClrMapping/>
+  </p:clrMapOvr>
+</p:sld>
+</file>
+
+<file path=ppt/slides/slide31.xml><?xml version="1.0" encoding="utf-8"?>
+<p:sld xmlns:a="http://schemas.openxmlformats.org/drawingml/2006/main" xmlns:p="http://schemas.openxmlformats.org/presentationml/2006/main" xmlns:r="http://schemas.openxmlformats.org/officeDocument/2006/relationships">
+  <p:cSld>
+    <p:bg>
+      <p:bgPr>
+        <a:solidFill>
+          <a:srgbClr val="000000"/>
+        </a:solidFill>
+        <a:effectLst/>
+      </p:bgPr>
+    </p:bg>
+    <p:spTree>
+      <p:nvGrpSpPr>
+        <p:cNvPr id="1" name=""/>
+        <p:cNvGrpSpPr/>
+        <p:nvPr/>
+      </p:nvGrpSpPr>
+      <p:grpSpPr/>
+      <p:sp>
+        <p:nvSpPr>
+          <p:cNvPr id="2" name="TextBox 1"/>
+          <p:cNvSpPr txBox="1"/>
+          <p:nvPr/>
+        </p:nvSpPr>
+        <p:spPr>
+          <a:xfrm>
+            <a:off x="640080" y="2052828"/>
+            <a:ext cx="10911535" cy="731520"/>
+          </a:xfrm>
+          <a:prstGeom prst="rect">
+            <a:avLst/>
+          </a:prstGeom>
+          <a:noFill/>
+        </p:spPr>
+        <p:txBody>
+          <a:bodyPr wrap="square">
+            <a:spAutoFit/>
+          </a:bodyPr>
+          <a:lstStyle/>
+          <a:p>
+            <a:pPr algn="ctr"/>
+            <a:r>
+              <a:rPr sz="4800" b="1" i="0">
+                <a:solidFill>
+                  <a:srgbClr val="FFFFFF"/>
                 </a:solidFill>
                 <a:latin typeface="Arial"/>
               </a:rPr>
@@ -3680,101 +5611,415 @@
       </p:sp>
       <p:sp>
         <p:nvSpPr>
-          <p:cNvPr id="5" name="TextBox 4"/>
-          <p:cNvSpPr txBox="1"/>
-          <p:nvPr/>
-        </p:nvSpPr>
-        <p:spPr>
-          <a:xfrm>
-            <a:off x="594360" y="3529584"/>
-            <a:ext cx="11002975" cy="685800"/>
-          </a:xfrm>
-          <a:prstGeom prst="rect">
-            <a:avLst/>
-          </a:prstGeom>
-          <a:noFill/>
-        </p:spPr>
-        <p:txBody>
-          <a:bodyPr wrap="square">
-            <a:spAutoFit/>
-          </a:bodyPr>
-          <a:lstStyle/>
-          <a:p>
-            <a:pPr algn="ctr"/>
-            <a:r>
-              <a:rPr sz="4400" b="1" i="0">
+          <p:cNvPr id="3" name="TextBox 2"/>
+          <p:cNvSpPr txBox="1"/>
+          <p:nvPr/>
+        </p:nvSpPr>
+        <p:spPr>
+          <a:xfrm>
+            <a:off x="640080" y="2985516"/>
+            <a:ext cx="10911535" cy="731520"/>
+          </a:xfrm>
+          <a:prstGeom prst="rect">
+            <a:avLst/>
+          </a:prstGeom>
+          <a:noFill/>
+        </p:spPr>
+        <p:txBody>
+          <a:bodyPr wrap="square">
+            <a:spAutoFit/>
+          </a:bodyPr>
+          <a:lstStyle/>
+          <a:p>
+            <a:pPr algn="ctr"/>
+            <a:r>
+              <a:rPr sz="4800" b="1" i="0">
                 <a:solidFill>
                   <a:srgbClr val="FFFFFF"/>
                 </a:solidFill>
                 <a:latin typeface="Arial"/>
               </a:rPr>
-              <a:t>主の名を　永遠に</a:t>
-            </a:r>
-          </a:p>
-        </p:txBody>
-      </p:sp>
-      <p:sp>
-        <p:nvSpPr>
-          <p:cNvPr id="6" name="TextBox 5"/>
-          <p:cNvSpPr txBox="1"/>
-          <p:nvPr/>
-        </p:nvSpPr>
-        <p:spPr>
-          <a:xfrm>
-            <a:off x="594360" y="4251960"/>
-            <a:ext cx="11002975" cy="384048"/>
-          </a:xfrm>
-          <a:prstGeom prst="rect">
-            <a:avLst/>
-          </a:prstGeom>
-          <a:noFill/>
-        </p:spPr>
-        <p:txBody>
-          <a:bodyPr wrap="square">
-            <a:spAutoFit/>
-          </a:bodyPr>
-          <a:lstStyle/>
-          <a:p>
-            <a:pPr algn="ctr"/>
-            <a:r>
-              <a:rPr sz="2400" b="0" i="1">
-                <a:solidFill>
-                  <a:srgbClr val="B4B4B4"/>
-                </a:solidFill>
-                <a:latin typeface="Arial"/>
-              </a:rPr>
-              <a:t>shu no na wo eien ni</a:t>
-            </a:r>
-          </a:p>
-        </p:txBody>
-      </p:sp>
-      <p:sp>
-        <p:nvSpPr>
-          <p:cNvPr id="7" name="TextBox 6"/>
-          <p:cNvSpPr txBox="1"/>
-          <p:nvPr/>
-        </p:nvSpPr>
-        <p:spPr>
-          <a:xfrm>
-            <a:off x="594360" y="4672584"/>
-            <a:ext cx="11002975" cy="347472"/>
-          </a:xfrm>
-          <a:prstGeom prst="rect">
-            <a:avLst/>
-          </a:prstGeom>
-          <a:noFill/>
-        </p:spPr>
-        <p:txBody>
-          <a:bodyPr wrap="square">
-            <a:spAutoFit/>
-          </a:bodyPr>
-          <a:lstStyle/>
-          <a:p>
-            <a:pPr algn="ctr"/>
-            <a:r>
-              <a:rPr sz="2000" b="0" i="1">
-                <a:solidFill>
-                  <a:srgbClr val="8C8C8C"/>
+              <a:t/>
+            </a:r>
+          </a:p>
+        </p:txBody>
+      </p:sp>
+    </p:spTree>
+  </p:cSld>
+  <p:clrMapOvr>
+    <a:masterClrMapping/>
+  </p:clrMapOvr>
+</p:sld>
+</file>
+
+<file path=ppt/slides/slide32.xml><?xml version="1.0" encoding="utf-8"?>
+<p:sld xmlns:a="http://schemas.openxmlformats.org/drawingml/2006/main" xmlns:p="http://schemas.openxmlformats.org/presentationml/2006/main" xmlns:r="http://schemas.openxmlformats.org/officeDocument/2006/relationships">
+  <p:cSld>
+    <p:bg>
+      <p:bgPr>
+        <a:solidFill>
+          <a:srgbClr val="000000"/>
+        </a:solidFill>
+        <a:effectLst/>
+      </p:bgPr>
+    </p:bg>
+    <p:spTree>
+      <p:nvGrpSpPr>
+        <p:cNvPr id="1" name=""/>
+        <p:cNvGrpSpPr/>
+        <p:nvPr/>
+      </p:nvGrpSpPr>
+      <p:grpSpPr/>
+      <p:sp>
+        <p:nvSpPr>
+          <p:cNvPr id="2" name="TextBox 1"/>
+          <p:cNvSpPr txBox="1"/>
+          <p:nvPr/>
+        </p:nvSpPr>
+        <p:spPr>
+          <a:xfrm>
+            <a:off x="640080" y="2052828"/>
+            <a:ext cx="10911535" cy="731520"/>
+          </a:xfrm>
+          <a:prstGeom prst="rect">
+            <a:avLst/>
+          </a:prstGeom>
+          <a:noFill/>
+        </p:spPr>
+        <p:txBody>
+          <a:bodyPr wrap="square">
+            <a:spAutoFit/>
+          </a:bodyPr>
+          <a:lstStyle/>
+          <a:p>
+            <a:pPr algn="ctr"/>
+            <a:r>
+              <a:rPr sz="4800" b="1" i="0">
+                <a:solidFill>
+                  <a:srgbClr val="FFFFFF"/>
+                </a:solidFill>
+                <a:latin typeface="Arial"/>
+              </a:rPr>
+              <a:t/>
+            </a:r>
+          </a:p>
+        </p:txBody>
+      </p:sp>
+      <p:sp>
+        <p:nvSpPr>
+          <p:cNvPr id="3" name="TextBox 2"/>
+          <p:cNvSpPr txBox="1"/>
+          <p:nvPr/>
+        </p:nvSpPr>
+        <p:spPr>
+          <a:xfrm>
+            <a:off x="640080" y="2985516"/>
+            <a:ext cx="10911535" cy="731520"/>
+          </a:xfrm>
+          <a:prstGeom prst="rect">
+            <a:avLst/>
+          </a:prstGeom>
+          <a:noFill/>
+        </p:spPr>
+        <p:txBody>
+          <a:bodyPr wrap="square">
+            <a:spAutoFit/>
+          </a:bodyPr>
+          <a:lstStyle/>
+          <a:p>
+            <a:pPr algn="ctr"/>
+            <a:r>
+              <a:rPr sz="4800" b="1" i="0">
+                <a:solidFill>
+                  <a:srgbClr val="FFFFFF"/>
+                </a:solidFill>
+                <a:latin typeface="Arial"/>
+              </a:rPr>
+              <a:t/>
+            </a:r>
+          </a:p>
+        </p:txBody>
+      </p:sp>
+    </p:spTree>
+  </p:cSld>
+  <p:clrMapOvr>
+    <a:masterClrMapping/>
+  </p:clrMapOvr>
+</p:sld>
+</file>
+
+<file path=ppt/slides/slide33.xml><?xml version="1.0" encoding="utf-8"?>
+<p:sld xmlns:a="http://schemas.openxmlformats.org/drawingml/2006/main" xmlns:p="http://schemas.openxmlformats.org/presentationml/2006/main" xmlns:r="http://schemas.openxmlformats.org/officeDocument/2006/relationships">
+  <p:cSld>
+    <p:bg>
+      <p:bgPr>
+        <a:solidFill>
+          <a:srgbClr val="000000"/>
+        </a:solidFill>
+        <a:effectLst/>
+      </p:bgPr>
+    </p:bg>
+    <p:spTree>
+      <p:nvGrpSpPr>
+        <p:cNvPr id="1" name=""/>
+        <p:cNvGrpSpPr/>
+        <p:nvPr/>
+      </p:nvGrpSpPr>
+      <p:grpSpPr/>
+      <p:sp>
+        <p:nvSpPr>
+          <p:cNvPr id="2" name="TextBox 1"/>
+          <p:cNvSpPr txBox="1"/>
+          <p:nvPr/>
+        </p:nvSpPr>
+        <p:spPr>
+          <a:xfrm>
+            <a:off x="640080" y="2052828"/>
+            <a:ext cx="10911535" cy="731520"/>
+          </a:xfrm>
+          <a:prstGeom prst="rect">
+            <a:avLst/>
+          </a:prstGeom>
+          <a:noFill/>
+        </p:spPr>
+        <p:txBody>
+          <a:bodyPr wrap="square">
+            <a:spAutoFit/>
+          </a:bodyPr>
+          <a:lstStyle/>
+          <a:p>
+            <a:pPr algn="ctr"/>
+            <a:r>
+              <a:rPr sz="4800" b="1" i="0">
+                <a:solidFill>
+                  <a:srgbClr val="FFFFFF"/>
+                </a:solidFill>
+                <a:latin typeface="Arial"/>
+              </a:rPr>
+              <a:t/>
+            </a:r>
+          </a:p>
+        </p:txBody>
+      </p:sp>
+      <p:sp>
+        <p:nvSpPr>
+          <p:cNvPr id="3" name="TextBox 2"/>
+          <p:cNvSpPr txBox="1"/>
+          <p:nvPr/>
+        </p:nvSpPr>
+        <p:spPr>
+          <a:xfrm>
+            <a:off x="640080" y="2985516"/>
+            <a:ext cx="10911535" cy="731520"/>
+          </a:xfrm>
+          <a:prstGeom prst="rect">
+            <a:avLst/>
+          </a:prstGeom>
+          <a:noFill/>
+        </p:spPr>
+        <p:txBody>
+          <a:bodyPr wrap="square">
+            <a:spAutoFit/>
+          </a:bodyPr>
+          <a:lstStyle/>
+          <a:p>
+            <a:pPr algn="ctr"/>
+            <a:r>
+              <a:rPr sz="4800" b="1" i="0">
+                <a:solidFill>
+                  <a:srgbClr val="FFFFFF"/>
+                </a:solidFill>
+                <a:latin typeface="Arial"/>
+              </a:rPr>
+              <a:t/>
+            </a:r>
+          </a:p>
+        </p:txBody>
+      </p:sp>
+    </p:spTree>
+  </p:cSld>
+  <p:clrMapOvr>
+    <a:masterClrMapping/>
+  </p:clrMapOvr>
+</p:sld>
+</file>
+
+<file path=ppt/slides/slide34.xml><?xml version="1.0" encoding="utf-8"?>
+<p:sld xmlns:a="http://schemas.openxmlformats.org/drawingml/2006/main" xmlns:p="http://schemas.openxmlformats.org/presentationml/2006/main" xmlns:r="http://schemas.openxmlformats.org/officeDocument/2006/relationships">
+  <p:cSld>
+    <p:bg>
+      <p:bgPr>
+        <a:solidFill>
+          <a:srgbClr val="000000"/>
+        </a:solidFill>
+        <a:effectLst/>
+      </p:bgPr>
+    </p:bg>
+    <p:spTree>
+      <p:nvGrpSpPr>
+        <p:cNvPr id="1" name=""/>
+        <p:cNvGrpSpPr/>
+        <p:nvPr/>
+      </p:nvGrpSpPr>
+      <p:grpSpPr/>
+      <p:sp>
+        <p:nvSpPr>
+          <p:cNvPr id="2" name="TextBox 1"/>
+          <p:cNvSpPr txBox="1"/>
+          <p:nvPr/>
+        </p:nvSpPr>
+        <p:spPr>
+          <a:xfrm>
+            <a:off x="640080" y="2052828"/>
+            <a:ext cx="10911535" cy="731520"/>
+          </a:xfrm>
+          <a:prstGeom prst="rect">
+            <a:avLst/>
+          </a:prstGeom>
+          <a:noFill/>
+        </p:spPr>
+        <p:txBody>
+          <a:bodyPr wrap="square">
+            <a:spAutoFit/>
+          </a:bodyPr>
+          <a:lstStyle/>
+          <a:p>
+            <a:pPr algn="ctr"/>
+            <a:r>
+              <a:rPr sz="4800" b="1" i="0">
+                <a:solidFill>
+                  <a:srgbClr val="FFFFFF"/>
+                </a:solidFill>
+                <a:latin typeface="Arial"/>
+              </a:rPr>
+              <a:t/>
+            </a:r>
+          </a:p>
+        </p:txBody>
+      </p:sp>
+      <p:sp>
+        <p:nvSpPr>
+          <p:cNvPr id="3" name="TextBox 2"/>
+          <p:cNvSpPr txBox="1"/>
+          <p:nvPr/>
+        </p:nvSpPr>
+        <p:spPr>
+          <a:xfrm>
+            <a:off x="640080" y="2985516"/>
+            <a:ext cx="10911535" cy="731520"/>
+          </a:xfrm>
+          <a:prstGeom prst="rect">
+            <a:avLst/>
+          </a:prstGeom>
+          <a:noFill/>
+        </p:spPr>
+        <p:txBody>
+          <a:bodyPr wrap="square">
+            <a:spAutoFit/>
+          </a:bodyPr>
+          <a:lstStyle/>
+          <a:p>
+            <a:pPr algn="ctr"/>
+            <a:r>
+              <a:rPr sz="4800" b="1" i="0">
+                <a:solidFill>
+                  <a:srgbClr val="FFFFFF"/>
+                </a:solidFill>
+                <a:latin typeface="Arial"/>
+              </a:rPr>
+              <a:t/>
+            </a:r>
+          </a:p>
+        </p:txBody>
+      </p:sp>
+    </p:spTree>
+  </p:cSld>
+  <p:clrMapOvr>
+    <a:masterClrMapping/>
+  </p:clrMapOvr>
+</p:sld>
+</file>
+
+<file path=ppt/slides/slide35.xml><?xml version="1.0" encoding="utf-8"?>
+<p:sld xmlns:a="http://schemas.openxmlformats.org/drawingml/2006/main" xmlns:p="http://schemas.openxmlformats.org/presentationml/2006/main" xmlns:r="http://schemas.openxmlformats.org/officeDocument/2006/relationships">
+  <p:cSld>
+    <p:bg>
+      <p:bgPr>
+        <a:solidFill>
+          <a:srgbClr val="000000"/>
+        </a:solidFill>
+        <a:effectLst/>
+      </p:bgPr>
+    </p:bg>
+    <p:spTree>
+      <p:nvGrpSpPr>
+        <p:cNvPr id="1" name=""/>
+        <p:cNvGrpSpPr/>
+        <p:nvPr/>
+      </p:nvGrpSpPr>
+      <p:grpSpPr/>
+      <p:sp>
+        <p:nvSpPr>
+          <p:cNvPr id="2" name="TextBox 1"/>
+          <p:cNvSpPr txBox="1"/>
+          <p:nvPr/>
+        </p:nvSpPr>
+        <p:spPr>
+          <a:xfrm>
+            <a:off x="640080" y="2052828"/>
+            <a:ext cx="10911535" cy="731520"/>
+          </a:xfrm>
+          <a:prstGeom prst="rect">
+            <a:avLst/>
+          </a:prstGeom>
+          <a:noFill/>
+        </p:spPr>
+        <p:txBody>
+          <a:bodyPr wrap="square">
+            <a:spAutoFit/>
+          </a:bodyPr>
+          <a:lstStyle/>
+          <a:p>
+            <a:pPr algn="ctr"/>
+            <a:r>
+              <a:rPr sz="4800" b="1" i="0">
+                <a:solidFill>
+                  <a:srgbClr val="FFFFFF"/>
+                </a:solidFill>
+                <a:latin typeface="Arial"/>
+              </a:rPr>
+              <a:t/>
+            </a:r>
+          </a:p>
+        </p:txBody>
+      </p:sp>
+      <p:sp>
+        <p:nvSpPr>
+          <p:cNvPr id="3" name="TextBox 2"/>
+          <p:cNvSpPr txBox="1"/>
+          <p:nvPr/>
+        </p:nvSpPr>
+        <p:spPr>
+          <a:xfrm>
+            <a:off x="640080" y="2985516"/>
+            <a:ext cx="10911535" cy="731520"/>
+          </a:xfrm>
+          <a:prstGeom prst="rect">
+            <a:avLst/>
+          </a:prstGeom>
+          <a:noFill/>
+        </p:spPr>
+        <p:txBody>
+          <a:bodyPr wrap="square">
+            <a:spAutoFit/>
+          </a:bodyPr>
+          <a:lstStyle/>
+          <a:p>
+            <a:pPr algn="ctr"/>
+            <a:r>
+              <a:rPr sz="4800" b="1" i="0">
+                <a:solidFill>
+                  <a:srgbClr val="FFFFFF"/>
                 </a:solidFill>
                 <a:latin typeface="Arial"/>
               </a:rPr>
@@ -3817,204 +6062,29 @@
         </p:nvSpPr>
         <p:spPr>
           <a:xfrm>
-            <a:off x="594360" y="1837944"/>
-            <a:ext cx="11002975" cy="685800"/>
-          </a:xfrm>
-          <a:prstGeom prst="rect">
-            <a:avLst/>
-          </a:prstGeom>
-          <a:noFill/>
-        </p:spPr>
-        <p:txBody>
-          <a:bodyPr wrap="square">
-            <a:spAutoFit/>
-          </a:bodyPr>
-          <a:lstStyle/>
-          <a:p>
-            <a:pPr algn="ctr"/>
-            <a:r>
-              <a:rPr sz="4400" b="1" i="0">
+            <a:off x="640080" y="2702052"/>
+            <a:ext cx="10911535" cy="731520"/>
+          </a:xfrm>
+          <a:prstGeom prst="rect">
+            <a:avLst/>
+          </a:prstGeom>
+          <a:noFill/>
+        </p:spPr>
+        <p:txBody>
+          <a:bodyPr wrap="square">
+            <a:spAutoFit/>
+          </a:bodyPr>
+          <a:lstStyle/>
+          <a:p>
+            <a:pPr algn="ctr"/>
+            <a:r>
+              <a:rPr sz="4800" b="1" i="0">
                 <a:solidFill>
                   <a:srgbClr val="FFFFFF"/>
                 </a:solidFill>
                 <a:latin typeface="Arial"/>
               </a:rPr>
-              <a:t>讃えよう　いつまでも</a:t>
-            </a:r>
-          </a:p>
-        </p:txBody>
-      </p:sp>
-      <p:sp>
-        <p:nvSpPr>
-          <p:cNvPr id="3" name="TextBox 2"/>
-          <p:cNvSpPr txBox="1"/>
-          <p:nvPr/>
-        </p:nvSpPr>
-        <p:spPr>
-          <a:xfrm>
-            <a:off x="594360" y="2560320"/>
-            <a:ext cx="11002975" cy="384048"/>
-          </a:xfrm>
-          <a:prstGeom prst="rect">
-            <a:avLst/>
-          </a:prstGeom>
-          <a:noFill/>
-        </p:spPr>
-        <p:txBody>
-          <a:bodyPr wrap="square">
-            <a:spAutoFit/>
-          </a:bodyPr>
-          <a:lstStyle/>
-          <a:p>
-            <a:pPr algn="ctr"/>
-            <a:r>
-              <a:rPr sz="2400" b="0" i="1">
-                <a:solidFill>
-                  <a:srgbClr val="B4B4B4"/>
-                </a:solidFill>
-                <a:latin typeface="Arial"/>
-              </a:rPr>
-              <a:t>tataeyou itsumademo</a:t>
-            </a:r>
-          </a:p>
-        </p:txBody>
-      </p:sp>
-      <p:sp>
-        <p:nvSpPr>
-          <p:cNvPr id="4" name="TextBox 3"/>
-          <p:cNvSpPr txBox="1"/>
-          <p:nvPr/>
-        </p:nvSpPr>
-        <p:spPr>
-          <a:xfrm>
-            <a:off x="594360" y="2980944"/>
-            <a:ext cx="11002975" cy="347472"/>
-          </a:xfrm>
-          <a:prstGeom prst="rect">
-            <a:avLst/>
-          </a:prstGeom>
-          <a:noFill/>
-        </p:spPr>
-        <p:txBody>
-          <a:bodyPr wrap="square">
-            <a:spAutoFit/>
-          </a:bodyPr>
-          <a:lstStyle/>
-          <a:p>
-            <a:pPr algn="ctr"/>
-            <a:r>
-              <a:rPr sz="2000" b="0" i="1">
-                <a:solidFill>
-                  <a:srgbClr val="8C8C8C"/>
-                </a:solidFill>
-                <a:latin typeface="Arial"/>
-              </a:rPr>
-              <a:t/>
-            </a:r>
-          </a:p>
-        </p:txBody>
-      </p:sp>
-      <p:sp>
-        <p:nvSpPr>
-          <p:cNvPr id="5" name="TextBox 4"/>
-          <p:cNvSpPr txBox="1"/>
-          <p:nvPr/>
-        </p:nvSpPr>
-        <p:spPr>
-          <a:xfrm>
-            <a:off x="594360" y="3529584"/>
-            <a:ext cx="11002975" cy="685800"/>
-          </a:xfrm>
-          <a:prstGeom prst="rect">
-            <a:avLst/>
-          </a:prstGeom>
-          <a:noFill/>
-        </p:spPr>
-        <p:txBody>
-          <a:bodyPr wrap="square">
-            <a:spAutoFit/>
-          </a:bodyPr>
-          <a:lstStyle/>
-          <a:p>
-            <a:pPr algn="ctr"/>
-            <a:r>
-              <a:rPr sz="4400" b="1" i="0">
-                <a:solidFill>
-                  <a:srgbClr val="FFFFFF"/>
-                </a:solidFill>
-                <a:latin typeface="Arial"/>
-              </a:rPr>
-              <a:t>イエス　あなたを</a:t>
-            </a:r>
-          </a:p>
-        </p:txBody>
-      </p:sp>
-      <p:sp>
-        <p:nvSpPr>
-          <p:cNvPr id="6" name="TextBox 5"/>
-          <p:cNvSpPr txBox="1"/>
-          <p:nvPr/>
-        </p:nvSpPr>
-        <p:spPr>
-          <a:xfrm>
-            <a:off x="594360" y="4251960"/>
-            <a:ext cx="11002975" cy="384048"/>
-          </a:xfrm>
-          <a:prstGeom prst="rect">
-            <a:avLst/>
-          </a:prstGeom>
-          <a:noFill/>
-        </p:spPr>
-        <p:txBody>
-          <a:bodyPr wrap="square">
-            <a:spAutoFit/>
-          </a:bodyPr>
-          <a:lstStyle/>
-          <a:p>
-            <a:pPr algn="ctr"/>
-            <a:r>
-              <a:rPr sz="2400" b="0" i="1">
-                <a:solidFill>
-                  <a:srgbClr val="B4B4B4"/>
-                </a:solidFill>
-                <a:latin typeface="Arial"/>
-              </a:rPr>
-              <a:t>iesu anata wo</a:t>
-            </a:r>
-          </a:p>
-        </p:txBody>
-      </p:sp>
-      <p:sp>
-        <p:nvSpPr>
-          <p:cNvPr id="7" name="TextBox 6"/>
-          <p:cNvSpPr txBox="1"/>
-          <p:nvPr/>
-        </p:nvSpPr>
-        <p:spPr>
-          <a:xfrm>
-            <a:off x="594360" y="4672584"/>
-            <a:ext cx="11002975" cy="347472"/>
-          </a:xfrm>
-          <a:prstGeom prst="rect">
-            <a:avLst/>
-          </a:prstGeom>
-          <a:noFill/>
-        </p:spPr>
-        <p:txBody>
-          <a:bodyPr wrap="square">
-            <a:spAutoFit/>
-          </a:bodyPr>
-          <a:lstStyle/>
-          <a:p>
-            <a:pPr algn="ctr"/>
-            <a:r>
-              <a:rPr sz="2000" b="0" i="1">
-                <a:solidFill>
-                  <a:srgbClr val="8C8C8C"/>
-                </a:solidFill>
-                <a:latin typeface="Arial"/>
-              </a:rPr>
-              <a:t/>
+              <a:t>Onde por mim morreu Jesus</a:t>
             </a:r>
           </a:p>
         </p:txBody>
@@ -4053,29 +6123,29 @@
         </p:nvSpPr>
         <p:spPr>
           <a:xfrm>
-            <a:off x="594360" y="1837944"/>
-            <a:ext cx="11002975" cy="685800"/>
-          </a:xfrm>
-          <a:prstGeom prst="rect">
-            <a:avLst/>
-          </a:prstGeom>
-          <a:noFill/>
-        </p:spPr>
-        <p:txBody>
-          <a:bodyPr wrap="square">
-            <a:spAutoFit/>
-          </a:bodyPr>
-          <a:lstStyle/>
-          <a:p>
-            <a:pPr algn="ctr"/>
-            <a:r>
-              <a:rPr sz="4400" b="1" i="0">
+            <a:off x="640080" y="2500884"/>
+            <a:ext cx="10911535" cy="731520"/>
+          </a:xfrm>
+          <a:prstGeom prst="rect">
+            <a:avLst/>
+          </a:prstGeom>
+          <a:noFill/>
+        </p:spPr>
+        <p:txBody>
+          <a:bodyPr wrap="square">
+            <a:spAutoFit/>
+          </a:bodyPr>
+          <a:lstStyle/>
+          <a:p>
+            <a:pPr algn="ctr"/>
+            <a:r>
+              <a:rPr sz="4800" b="1" i="0">
                 <a:solidFill>
                   <a:srgbClr val="FFFFFF"/>
                 </a:solidFill>
                 <a:latin typeface="Arial"/>
               </a:rPr>
-              <a:t>讃えよう、神の名を</a:t>
+              <a:t>亜麻ぬのに巻かれ ヨセフの墓へ と</a:t>
             </a:r>
           </a:p>
         </p:txBody>
@@ -4088,8 +6158,8 @@
         </p:nvSpPr>
         <p:spPr>
           <a:xfrm>
-            <a:off x="594360" y="2560320"/>
-            <a:ext cx="11002975" cy="384048"/>
+            <a:off x="640080" y="3268980"/>
+            <a:ext cx="10911535" cy="365760"/>
           </a:xfrm>
           <a:prstGeom prst="rect">
             <a:avLst/>
@@ -4106,11 +6176,11 @@
             <a:r>
               <a:rPr sz="2400" b="0" i="1">
                 <a:solidFill>
-                  <a:srgbClr val="B4B4B4"/>
-                </a:solidFill>
-                <a:latin typeface="Arial"/>
-              </a:rPr>
-              <a:t>tataeyo kami no na wo</a:t>
+                  <a:srgbClr val="AAAAAA"/>
+                </a:solidFill>
+                <a:latin typeface="Arial"/>
+              </a:rPr>
+              <a:t>ama nunoni maka re yosefu no haka he to</a:t>
             </a:r>
           </a:p>
         </p:txBody>
@@ -4123,8 +6193,8 @@
         </p:nvSpPr>
         <p:spPr>
           <a:xfrm>
-            <a:off x="594360" y="2980944"/>
-            <a:ext cx="11002975" cy="347472"/>
+            <a:off x="640080" y="4046220"/>
+            <a:ext cx="10911535" cy="310896"/>
           </a:xfrm>
           <a:prstGeom prst="rect">
             <a:avLst/>
@@ -4141,116 +6211,11 @@
             <a:r>
               <a:rPr sz="2000" b="0" i="1">
                 <a:solidFill>
-                  <a:srgbClr val="8C8C8C"/>
-                </a:solidFill>
-                <a:latin typeface="Arial"/>
-              </a:rPr>
-              <a:t/>
-            </a:r>
-          </a:p>
-        </p:txBody>
-      </p:sp>
-      <p:sp>
-        <p:nvSpPr>
-          <p:cNvPr id="5" name="TextBox 4"/>
-          <p:cNvSpPr txBox="1"/>
-          <p:nvPr/>
-        </p:nvSpPr>
-        <p:spPr>
-          <a:xfrm>
-            <a:off x="594360" y="3529584"/>
-            <a:ext cx="11002975" cy="685800"/>
-          </a:xfrm>
-          <a:prstGeom prst="rect">
-            <a:avLst/>
-          </a:prstGeom>
-          <a:noFill/>
-        </p:spPr>
-        <p:txBody>
-          <a:bodyPr wrap="square">
-            <a:spAutoFit/>
-          </a:bodyPr>
-          <a:lstStyle/>
-          <a:p>
-            <a:pPr algn="ctr"/>
-            <a:r>
-              <a:rPr sz="4400" b="1" i="0">
-                <a:solidFill>
-                  <a:srgbClr val="FFFFFF"/>
-                </a:solidFill>
-                <a:latin typeface="Arial"/>
-              </a:rPr>
-              <a:t>主の名を　永遠に</a:t>
-            </a:r>
-          </a:p>
-        </p:txBody>
-      </p:sp>
-      <p:sp>
-        <p:nvSpPr>
-          <p:cNvPr id="6" name="TextBox 5"/>
-          <p:cNvSpPr txBox="1"/>
-          <p:nvPr/>
-        </p:nvSpPr>
-        <p:spPr>
-          <a:xfrm>
-            <a:off x="594360" y="4251960"/>
-            <a:ext cx="11002975" cy="384048"/>
-          </a:xfrm>
-          <a:prstGeom prst="rect">
-            <a:avLst/>
-          </a:prstGeom>
-          <a:noFill/>
-        </p:spPr>
-        <p:txBody>
-          <a:bodyPr wrap="square">
-            <a:spAutoFit/>
-          </a:bodyPr>
-          <a:lstStyle/>
-          <a:p>
-            <a:pPr algn="ctr"/>
-            <a:r>
-              <a:rPr sz="2400" b="0" i="1">
-                <a:solidFill>
-                  <a:srgbClr val="B4B4B4"/>
-                </a:solidFill>
-                <a:latin typeface="Arial"/>
-              </a:rPr>
-              <a:t>shu no na wo eien ni</a:t>
-            </a:r>
-          </a:p>
-        </p:txBody>
-      </p:sp>
-      <p:sp>
-        <p:nvSpPr>
-          <p:cNvPr id="7" name="TextBox 6"/>
-          <p:cNvSpPr txBox="1"/>
-          <p:nvPr/>
-        </p:nvSpPr>
-        <p:spPr>
-          <a:xfrm>
-            <a:off x="594360" y="4672584"/>
-            <a:ext cx="11002975" cy="347472"/>
-          </a:xfrm>
-          <a:prstGeom prst="rect">
-            <a:avLst/>
-          </a:prstGeom>
-          <a:noFill/>
-        </p:spPr>
-        <p:txBody>
-          <a:bodyPr wrap="square">
-            <a:spAutoFit/>
-          </a:bodyPr>
-          <a:lstStyle/>
-          <a:p>
-            <a:pPr algn="ctr"/>
-            <a:r>
-              <a:rPr sz="2000" b="0" i="1">
-                <a:solidFill>
-                  <a:srgbClr val="8C8C8C"/>
-                </a:solidFill>
-                <a:latin typeface="Arial"/>
-              </a:rPr>
-              <a:t/>
+                  <a:srgbClr val="828282"/>
+                </a:solidFill>
+                <a:latin typeface="Arial"/>
+              </a:rPr>
+              <a:t>Para o calvário olharei</a:t>
             </a:r>
           </a:p>
         </p:txBody>
@@ -4289,8 +6254,69 @@
         </p:nvSpPr>
         <p:spPr>
           <a:xfrm>
-            <a:off x="594360" y="1837944"/>
-            <a:ext cx="11002975" cy="685800"/>
+            <a:off x="640080" y="2702052"/>
+            <a:ext cx="10911535" cy="731520"/>
+          </a:xfrm>
+          <a:prstGeom prst="rect">
+            <a:avLst/>
+          </a:prstGeom>
+          <a:noFill/>
+        </p:spPr>
+        <p:txBody>
+          <a:bodyPr wrap="square">
+            <a:spAutoFit/>
+          </a:bodyPr>
+          <a:lstStyle/>
+          <a:p>
+            <a:pPr algn="ctr"/>
+            <a:r>
+              <a:rPr sz="4800" b="1" i="0">
+                <a:solidFill>
+                  <a:srgbClr val="FFFFFF"/>
+                </a:solidFill>
+                <a:latin typeface="Arial"/>
+              </a:rPr>
+              <a:t>Vejo seu corpo em tanta dor</a:t>
+            </a:r>
+          </a:p>
+        </p:txBody>
+      </p:sp>
+    </p:spTree>
+  </p:cSld>
+  <p:clrMapOvr>
+    <a:masterClrMapping/>
+  </p:clrMapOvr>
+</p:sld>
+</file>
+
+<file path=ppt/slides/slide7.xml><?xml version="1.0" encoding="utf-8"?>
+<p:sld xmlns:a="http://schemas.openxmlformats.org/drawingml/2006/main" xmlns:p="http://schemas.openxmlformats.org/presentationml/2006/main" xmlns:r="http://schemas.openxmlformats.org/officeDocument/2006/relationships">
+  <p:cSld>
+    <p:bg>
+      <p:bgPr>
+        <a:solidFill>
+          <a:srgbClr val="000000"/>
+        </a:solidFill>
+        <a:effectLst/>
+      </p:bgPr>
+    </p:bg>
+    <p:spTree>
+      <p:nvGrpSpPr>
+        <p:cNvPr id="1" name=""/>
+        <p:cNvGrpSpPr/>
+        <p:nvPr/>
+      </p:nvGrpSpPr>
+      <p:grpSpPr/>
+      <p:sp>
+        <p:nvSpPr>
+          <p:cNvPr id="2" name="TextBox 1"/>
+          <p:cNvSpPr txBox="1"/>
+          <p:nvPr/>
+        </p:nvSpPr>
+        <p:spPr>
+          <a:xfrm>
+            <a:off x="640080" y="2500884"/>
+            <a:ext cx="10911535" cy="731520"/>
           </a:xfrm>
           <a:prstGeom prst="rect">
             <a:avLst/>
@@ -4311,7 +6337,7 @@
                 </a:solidFill>
                 <a:latin typeface="Arial"/>
               </a:rPr>
-              <a:t>歌おう　いつまでも</a:t>
+              <a:t>出口 は   閉ざさ   れ   一人ほ-むられ た</a:t>
             </a:r>
           </a:p>
         </p:txBody>
@@ -4324,8 +6350,8 @@
         </p:nvSpPr>
         <p:spPr>
           <a:xfrm>
-            <a:off x="594360" y="2560320"/>
-            <a:ext cx="11002975" cy="384048"/>
+            <a:off x="640080" y="3268980"/>
+            <a:ext cx="10911535" cy="365760"/>
           </a:xfrm>
           <a:prstGeom prst="rect">
             <a:avLst/>
@@ -4342,11 +6368,11 @@
             <a:r>
               <a:rPr sz="2400" b="0" i="1">
                 <a:solidFill>
-                  <a:srgbClr val="B4B4B4"/>
-                </a:solidFill>
-                <a:latin typeface="Arial"/>
-              </a:rPr>
-              <a:t>tataeyou itsumademo</a:t>
+                  <a:srgbClr val="AAAAAA"/>
+                </a:solidFill>
+                <a:latin typeface="Arial"/>
+              </a:rPr>
+              <a:t>deguchi ha toza sa re hitori ho - murare ta</a:t>
             </a:r>
           </a:p>
         </p:txBody>
@@ -4359,8 +6385,8 @@
         </p:nvSpPr>
         <p:spPr>
           <a:xfrm>
-            <a:off x="594360" y="2980944"/>
-            <a:ext cx="11002975" cy="347472"/>
+            <a:off x="640080" y="4046220"/>
+            <a:ext cx="10911535" cy="310896"/>
           </a:xfrm>
           <a:prstGeom prst="rect">
             <a:avLst/>
@@ -4377,116 +6403,203 @@
             <a:r>
               <a:rPr sz="2000" b="0" i="1">
                 <a:solidFill>
-                  <a:srgbClr val="8C8C8C"/>
-                </a:solidFill>
-                <a:latin typeface="Arial"/>
-              </a:rPr>
-              <a:t/>
-            </a:r>
-          </a:p>
-        </p:txBody>
-      </p:sp>
-      <p:sp>
-        <p:nvSpPr>
-          <p:cNvPr id="5" name="TextBox 4"/>
-          <p:cNvSpPr txBox="1"/>
-          <p:nvPr/>
-        </p:nvSpPr>
-        <p:spPr>
-          <a:xfrm>
-            <a:off x="594360" y="3529584"/>
-            <a:ext cx="11002975" cy="685800"/>
-          </a:xfrm>
-          <a:prstGeom prst="rect">
-            <a:avLst/>
-          </a:prstGeom>
-          <a:noFill/>
-        </p:spPr>
-        <p:txBody>
-          <a:bodyPr wrap="square">
-            <a:spAutoFit/>
-          </a:bodyPr>
-          <a:lstStyle/>
-          <a:p>
-            <a:pPr algn="ctr"/>
-            <a:r>
-              <a:rPr sz="4400" b="1" i="0">
+                  <a:srgbClr val="828282"/>
+                </a:solidFill>
+                <a:latin typeface="Arial"/>
+              </a:rPr>
+              <a:t>Para o calvário olharei</a:t>
+            </a:r>
+          </a:p>
+        </p:txBody>
+      </p:sp>
+    </p:spTree>
+  </p:cSld>
+  <p:clrMapOvr>
+    <a:masterClrMapping/>
+  </p:clrMapOvr>
+</p:sld>
+</file>
+
+<file path=ppt/slides/slide8.xml><?xml version="1.0" encoding="utf-8"?>
+<p:sld xmlns:a="http://schemas.openxmlformats.org/drawingml/2006/main" xmlns:p="http://schemas.openxmlformats.org/presentationml/2006/main" xmlns:r="http://schemas.openxmlformats.org/officeDocument/2006/relationships">
+  <p:cSld>
+    <p:bg>
+      <p:bgPr>
+        <a:solidFill>
+          <a:srgbClr val="000000"/>
+        </a:solidFill>
+        <a:effectLst/>
+      </p:bgPr>
+    </p:bg>
+    <p:spTree>
+      <p:nvGrpSpPr>
+        <p:cNvPr id="1" name=""/>
+        <p:cNvGrpSpPr/>
+        <p:nvPr/>
+      </p:nvGrpSpPr>
+      <p:grpSpPr/>
+      <p:sp>
+        <p:nvSpPr>
+          <p:cNvPr id="2" name="TextBox 1"/>
+          <p:cNvSpPr txBox="1"/>
+          <p:nvPr/>
+        </p:nvSpPr>
+        <p:spPr>
+          <a:xfrm>
+            <a:off x="640080" y="2052828"/>
+            <a:ext cx="10911535" cy="731520"/>
+          </a:xfrm>
+          <a:prstGeom prst="rect">
+            <a:avLst/>
+          </a:prstGeom>
+          <a:noFill/>
+        </p:spPr>
+        <p:txBody>
+          <a:bodyPr wrap="square">
+            <a:spAutoFit/>
+          </a:bodyPr>
+          <a:lstStyle/>
+          <a:p>
+            <a:pPr algn="ctr"/>
+            <a:r>
+              <a:rPr sz="4800" b="1" i="0">
                 <a:solidFill>
                   <a:srgbClr val="FFFFFF"/>
                 </a:solidFill>
                 <a:latin typeface="Arial"/>
               </a:rPr>
-              <a:t>イエス　あなたを</a:t>
-            </a:r>
-          </a:p>
-        </p:txBody>
-      </p:sp>
-      <p:sp>
-        <p:nvSpPr>
-          <p:cNvPr id="6" name="TextBox 5"/>
-          <p:cNvSpPr txBox="1"/>
-          <p:nvPr/>
-        </p:nvSpPr>
-        <p:spPr>
-          <a:xfrm>
-            <a:off x="594360" y="4251960"/>
-            <a:ext cx="11002975" cy="384048"/>
-          </a:xfrm>
-          <a:prstGeom prst="rect">
-            <a:avLst/>
-          </a:prstGeom>
-          <a:noFill/>
-        </p:spPr>
-        <p:txBody>
-          <a:bodyPr wrap="square">
-            <a:spAutoFit/>
-          </a:bodyPr>
-          <a:lstStyle/>
-          <a:p>
-            <a:pPr algn="ctr"/>
-            <a:r>
-              <a:rPr sz="2400" b="0" i="1">
-                <a:solidFill>
-                  <a:srgbClr val="B4B4B4"/>
-                </a:solidFill>
-                <a:latin typeface="Arial"/>
-              </a:rPr>
-              <a:t>iesu anata wo</a:t>
-            </a:r>
-          </a:p>
-        </p:txBody>
-      </p:sp>
-      <p:sp>
-        <p:nvSpPr>
-          <p:cNvPr id="7" name="TextBox 6"/>
-          <p:cNvSpPr txBox="1"/>
-          <p:nvPr/>
-        </p:nvSpPr>
-        <p:spPr>
-          <a:xfrm>
-            <a:off x="594360" y="4672584"/>
-            <a:ext cx="11002975" cy="347472"/>
-          </a:xfrm>
-          <a:prstGeom prst="rect">
-            <a:avLst/>
-          </a:prstGeom>
-          <a:noFill/>
-        </p:spPr>
-        <p:txBody>
-          <a:bodyPr wrap="square">
-            <a:spAutoFit/>
-          </a:bodyPr>
-          <a:lstStyle/>
-          <a:p>
-            <a:pPr algn="ctr"/>
-            <a:r>
-              <a:rPr sz="2000" b="0" i="1">
-                <a:solidFill>
-                  <a:srgbClr val="8C8C8C"/>
-                </a:solidFill>
-                <a:latin typeface="Arial"/>
-              </a:rPr>
-              <a:t/>
+              <a:t>Naquela cruz, meu Salvador</a:t>
+            </a:r>
+          </a:p>
+        </p:txBody>
+      </p:sp>
+      <p:sp>
+        <p:nvSpPr>
+          <p:cNvPr id="3" name="TextBox 2"/>
+          <p:cNvSpPr txBox="1"/>
+          <p:nvPr/>
+        </p:nvSpPr>
+        <p:spPr>
+          <a:xfrm>
+            <a:off x="640080" y="2985516"/>
+            <a:ext cx="10911535" cy="731520"/>
+          </a:xfrm>
+          <a:prstGeom prst="rect">
+            <a:avLst/>
+          </a:prstGeom>
+          <a:noFill/>
+        </p:spPr>
+        <p:txBody>
+          <a:bodyPr wrap="square">
+            <a:spAutoFit/>
+          </a:bodyPr>
+          <a:lstStyle/>
+          <a:p>
+            <a:pPr algn="ctr"/>
+            <a:r>
+              <a:rPr sz="4800" b="1" i="0">
+                <a:solidFill>
+                  <a:srgbClr val="FFFFFF"/>
+                </a:solidFill>
+                <a:latin typeface="Arial"/>
+              </a:rPr>
+              <a:t>Seu corpo sepultado foi</a:t>
+            </a:r>
+          </a:p>
+        </p:txBody>
+      </p:sp>
+    </p:spTree>
+  </p:cSld>
+  <p:clrMapOvr>
+    <a:masterClrMapping/>
+  </p:clrMapOvr>
+</p:sld>
+</file>
+
+<file path=ppt/slides/slide9.xml><?xml version="1.0" encoding="utf-8"?>
+<p:sld xmlns:a="http://schemas.openxmlformats.org/drawingml/2006/main" xmlns:p="http://schemas.openxmlformats.org/presentationml/2006/main" xmlns:r="http://schemas.openxmlformats.org/officeDocument/2006/relationships">
+  <p:cSld>
+    <p:bg>
+      <p:bgPr>
+        <a:solidFill>
+          <a:srgbClr val="000000"/>
+        </a:solidFill>
+        <a:effectLst/>
+      </p:bgPr>
+    </p:bg>
+    <p:spTree>
+      <p:nvGrpSpPr>
+        <p:cNvPr id="1" name=""/>
+        <p:cNvGrpSpPr/>
+        <p:nvPr/>
+      </p:nvGrpSpPr>
+      <p:grpSpPr/>
+      <p:sp>
+        <p:nvSpPr>
+          <p:cNvPr id="2" name="TextBox 1"/>
+          <p:cNvSpPr txBox="1"/>
+          <p:nvPr/>
+        </p:nvSpPr>
+        <p:spPr>
+          <a:xfrm>
+            <a:off x="640080" y="2052828"/>
+            <a:ext cx="10911535" cy="731520"/>
+          </a:xfrm>
+          <a:prstGeom prst="rect">
+            <a:avLst/>
+          </a:prstGeom>
+          <a:noFill/>
+        </p:spPr>
+        <p:txBody>
+          <a:bodyPr wrap="square">
+            <a:spAutoFit/>
+          </a:bodyPr>
+          <a:lstStyle/>
+          <a:p>
+            <a:pPr algn="ctr"/>
+            <a:r>
+              <a:rPr sz="4800" b="1" i="0">
+                <a:solidFill>
+                  <a:srgbClr val="FFFFFF"/>
+                </a:solidFill>
+                <a:latin typeface="Arial"/>
+              </a:rPr>
+              <a:t>Na tumba que José comprou</a:t>
+            </a:r>
+          </a:p>
+        </p:txBody>
+      </p:sp>
+      <p:sp>
+        <p:nvSpPr>
+          <p:cNvPr id="3" name="TextBox 2"/>
+          <p:cNvSpPr txBox="1"/>
+          <p:nvPr/>
+        </p:nvSpPr>
+        <p:spPr>
+          <a:xfrm>
+            <a:off x="640080" y="2985516"/>
+            <a:ext cx="10911535" cy="731520"/>
+          </a:xfrm>
+          <a:prstGeom prst="rect">
+            <a:avLst/>
+          </a:prstGeom>
+          <a:noFill/>
+        </p:spPr>
+        <p:txBody>
+          <a:bodyPr wrap="square">
+            <a:spAutoFit/>
+          </a:bodyPr>
+          <a:lstStyle/>
+          <a:p>
+            <a:pPr algn="ctr"/>
+            <a:r>
+              <a:rPr sz="4800" b="1" i="0">
+                <a:solidFill>
+                  <a:srgbClr val="FFFFFF"/>
+                </a:solidFill>
+                <a:latin typeface="Arial"/>
+              </a:rPr>
+              <a:t>Sozinho ali, O Rei ficou</a:t>
             </a:r>
           </a:p>
         </p:txBody>

--- a/output_pptx/O_Praise_The_Name_Anástasis.pptx
+++ b/output_pptx/O_Praise_The_Name_Anástasis.pptx
@@ -3331,6 +3331,76 @@
           </a:p>
         </p:txBody>
       </p:sp>
+      <p:sp>
+        <p:nvSpPr>
+          <p:cNvPr id="4" name="TextBox 3"/>
+          <p:cNvSpPr txBox="1"/>
+          <p:nvPr/>
+        </p:nvSpPr>
+        <p:spPr>
+          <a:xfrm>
+            <a:off x="640080" y="4128516"/>
+            <a:ext cx="10911535" cy="310896"/>
+          </a:xfrm>
+          <a:prstGeom prst="rect">
+            <a:avLst/>
+          </a:prstGeom>
+          <a:noFill/>
+        </p:spPr>
+        <p:txBody>
+          <a:bodyPr wrap="square">
+            <a:spAutoFit/>
+          </a:bodyPr>
+          <a:lstStyle/>
+          <a:p>
+            <a:pPr algn="ctr"/>
+            <a:r>
+              <a:rPr sz="2000" b="0" i="0">
+                <a:solidFill>
+                  <a:srgbClr val="828282"/>
+                </a:solidFill>
+                <a:latin typeface="Arial"/>
+              </a:rPr>
+              <a:t>イエス・メシア、主よ</a:t>
+            </a:r>
+          </a:p>
+        </p:txBody>
+      </p:sp>
+      <p:sp>
+        <p:nvSpPr>
+          <p:cNvPr id="5" name="TextBox 4"/>
+          <p:cNvSpPr txBox="1"/>
+          <p:nvPr/>
+        </p:nvSpPr>
+        <p:spPr>
+          <a:xfrm>
+            <a:off x="640080" y="4494276"/>
+            <a:ext cx="10911535" cy="310896"/>
+          </a:xfrm>
+          <a:prstGeom prst="rect">
+            <a:avLst/>
+          </a:prstGeom>
+          <a:noFill/>
+        </p:spPr>
+        <p:txBody>
+          <a:bodyPr wrap="square">
+            <a:spAutoFit/>
+          </a:bodyPr>
+          <a:lstStyle/>
+          <a:p>
+            <a:pPr algn="ctr"/>
+            <a:r>
+              <a:rPr sz="2000" b="0" i="0">
+                <a:solidFill>
+                  <a:srgbClr val="828282"/>
+                </a:solidFill>
+                <a:latin typeface="Arial"/>
+              </a:rPr>
+              <a:t>絶えずその名を褒め称えよ</a:t>
+            </a:r>
+          </a:p>
+        </p:txBody>
+      </p:sp>
     </p:spTree>
   </p:cSld>
   <p:clrMapOvr>
@@ -3427,6 +3497,76 @@
           </a:p>
         </p:txBody>
       </p:sp>
+      <p:sp>
+        <p:nvSpPr>
+          <p:cNvPr id="4" name="TextBox 3"/>
+          <p:cNvSpPr txBox="1"/>
+          <p:nvPr/>
+        </p:nvSpPr>
+        <p:spPr>
+          <a:xfrm>
+            <a:off x="640080" y="4128516"/>
+            <a:ext cx="10911535" cy="310896"/>
+          </a:xfrm>
+          <a:prstGeom prst="rect">
+            <a:avLst/>
+          </a:prstGeom>
+          <a:noFill/>
+        </p:spPr>
+        <p:txBody>
+          <a:bodyPr wrap="square">
+            <a:spAutoFit/>
+          </a:bodyPr>
+          <a:lstStyle/>
+          <a:p>
+            <a:pPr algn="ctr"/>
+            <a:r>
+              <a:rPr sz="2000" b="0" i="0">
+                <a:solidFill>
+                  <a:srgbClr val="828282"/>
+                </a:solidFill>
+                <a:latin typeface="Arial"/>
+              </a:rPr>
+              <a:t>永遠にあなたをあがめます</a:t>
+            </a:r>
+          </a:p>
+        </p:txBody>
+      </p:sp>
+      <p:sp>
+        <p:nvSpPr>
+          <p:cNvPr id="5" name="TextBox 4"/>
+          <p:cNvSpPr txBox="1"/>
+          <p:nvPr/>
+        </p:nvSpPr>
+        <p:spPr>
+          <a:xfrm>
+            <a:off x="640080" y="4494276"/>
+            <a:ext cx="10911535" cy="310896"/>
+          </a:xfrm>
+          <a:prstGeom prst="rect">
+            <a:avLst/>
+          </a:prstGeom>
+          <a:noFill/>
+        </p:spPr>
+        <p:txBody>
+          <a:bodyPr wrap="square">
+            <a:spAutoFit/>
+          </a:bodyPr>
+          <a:lstStyle/>
+          <a:p>
+            <a:pPr algn="ctr"/>
+            <a:r>
+              <a:rPr sz="2000" b="0" i="0">
+                <a:solidFill>
+                  <a:srgbClr val="828282"/>
+                </a:solidFill>
+                <a:latin typeface="Arial"/>
+              </a:rPr>
+              <a:t>主よ、主よ、わが神よ</a:t>
+            </a:r>
+          </a:p>
+        </p:txBody>
+      </p:sp>
     </p:spTree>
   </p:cSld>
   <p:clrMapOvr>
@@ -3523,6 +3663,76 @@
           </a:p>
         </p:txBody>
       </p:sp>
+      <p:sp>
+        <p:nvSpPr>
+          <p:cNvPr id="4" name="TextBox 3"/>
+          <p:cNvSpPr txBox="1"/>
+          <p:nvPr/>
+        </p:nvSpPr>
+        <p:spPr>
+          <a:xfrm>
+            <a:off x="640080" y="4128516"/>
+            <a:ext cx="10911535" cy="310896"/>
+          </a:xfrm>
+          <a:prstGeom prst="rect">
+            <a:avLst/>
+          </a:prstGeom>
+          <a:noFill/>
+        </p:spPr>
+        <p:txBody>
+          <a:bodyPr wrap="square">
+            <a:spAutoFit/>
+          </a:bodyPr>
+          <a:lstStyle/>
+          <a:p>
+            <a:pPr algn="ctr"/>
+            <a:r>
+              <a:rPr sz="2000" b="0" i="0">
+                <a:solidFill>
+                  <a:srgbClr val="828282"/>
+                </a:solidFill>
+                <a:latin typeface="Arial"/>
+              </a:rPr>
+              <a:t>そして三日目に</a:t>
+            </a:r>
+          </a:p>
+        </p:txBody>
+      </p:sp>
+      <p:sp>
+        <p:nvSpPr>
+          <p:cNvPr id="5" name="TextBox 4"/>
+          <p:cNvSpPr txBox="1"/>
+          <p:nvPr/>
+        </p:nvSpPr>
+        <p:spPr>
+          <a:xfrm>
+            <a:off x="640080" y="4494276"/>
+            <a:ext cx="10911535" cy="310896"/>
+          </a:xfrm>
+          <a:prstGeom prst="rect">
+            <a:avLst/>
+          </a:prstGeom>
+          <a:noFill/>
+        </p:spPr>
+        <p:txBody>
+          <a:bodyPr wrap="square">
+            <a:spAutoFit/>
+          </a:bodyPr>
+          <a:lstStyle/>
+          <a:p>
+            <a:pPr algn="ctr"/>
+            <a:r>
+              <a:rPr sz="2000" b="0" i="0">
+                <a:solidFill>
+                  <a:srgbClr val="828282"/>
+                </a:solidFill>
+                <a:latin typeface="Arial"/>
+              </a:rPr>
+              <a:t>死よ、あなたの針はどこにあるか</a:t>
+            </a:r>
+          </a:p>
+        </p:txBody>
+      </p:sp>
     </p:spTree>
   </p:cSld>
   <p:clrMapOvr>
@@ -3619,6 +3829,76 @@
           </a:p>
         </p:txBody>
       </p:sp>
+      <p:sp>
+        <p:nvSpPr>
+          <p:cNvPr id="4" name="TextBox 3"/>
+          <p:cNvSpPr txBox="1"/>
+          <p:nvPr/>
+        </p:nvSpPr>
+        <p:spPr>
+          <a:xfrm>
+            <a:off x="640080" y="4128516"/>
+            <a:ext cx="10911535" cy="310896"/>
+          </a:xfrm>
+          <a:prstGeom prst="rect">
+            <a:avLst/>
+          </a:prstGeom>
+          <a:noFill/>
+        </p:spPr>
+        <p:txBody>
+          <a:bodyPr wrap="square">
+            <a:spAutoFit/>
+          </a:bodyPr>
+          <a:lstStyle/>
+          <a:p>
+            <a:pPr algn="ctr"/>
+            <a:r>
+              <a:rPr sz="2000" b="0" i="0">
+                <a:solidFill>
+                  <a:srgbClr val="828282"/>
+                </a:solidFill>
+                <a:latin typeface="Arial"/>
+              </a:rPr>
+              <a:t>キリスト、王への礼拝</a:t>
+            </a:r>
+          </a:p>
+        </p:txBody>
+      </p:sp>
+      <p:sp>
+        <p:nvSpPr>
+          <p:cNvPr id="5" name="TextBox 4"/>
+          <p:cNvSpPr txBox="1"/>
+          <p:nvPr/>
+        </p:nvSpPr>
+        <p:spPr>
+          <a:xfrm>
+            <a:off x="640080" y="4494276"/>
+            <a:ext cx="10911535" cy="310896"/>
+          </a:xfrm>
+          <a:prstGeom prst="rect">
+            <a:avLst/>
+          </a:prstGeom>
+          <a:noFill/>
+        </p:spPr>
+        <p:txBody>
+          <a:bodyPr wrap="square">
+            <a:spAutoFit/>
+          </a:bodyPr>
+          <a:lstStyle/>
+          <a:p>
+            <a:pPr algn="ctr"/>
+            <a:r>
+              <a:rPr sz="2000" b="0" i="0">
+                <a:solidFill>
+                  <a:srgbClr val="828282"/>
+                </a:solidFill>
+                <a:latin typeface="Arial"/>
+              </a:rPr>
+              <a:t>わが神の名を褒め称えよ</a:t>
+            </a:r>
+          </a:p>
+        </p:txBody>
+      </p:sp>
     </p:spTree>
   </p:cSld>
   <p:clrMapOvr>
@@ -3715,6 +3995,76 @@
           </a:p>
         </p:txBody>
       </p:sp>
+      <p:sp>
+        <p:nvSpPr>
+          <p:cNvPr id="4" name="TextBox 3"/>
+          <p:cNvSpPr txBox="1"/>
+          <p:nvPr/>
+        </p:nvSpPr>
+        <p:spPr>
+          <a:xfrm>
+            <a:off x="640080" y="4128516"/>
+            <a:ext cx="10911535" cy="310896"/>
+          </a:xfrm>
+          <a:prstGeom prst="rect">
+            <a:avLst/>
+          </a:prstGeom>
+          <a:noFill/>
+        </p:spPr>
+        <p:txBody>
+          <a:bodyPr wrap="square">
+            <a:spAutoFit/>
+          </a:bodyPr>
+          <a:lstStyle/>
+          <a:p>
+            <a:pPr algn="ctr"/>
+            <a:r>
+              <a:rPr sz="2000" b="0" i="0">
+                <a:solidFill>
+                  <a:srgbClr val="828282"/>
+                </a:solidFill>
+                <a:latin typeface="Arial"/>
+              </a:rPr>
+              <a:t>絶えずその名を褒め称えよ</a:t>
+            </a:r>
+          </a:p>
+        </p:txBody>
+      </p:sp>
+      <p:sp>
+        <p:nvSpPr>
+          <p:cNvPr id="5" name="TextBox 4"/>
+          <p:cNvSpPr txBox="1"/>
+          <p:nvPr/>
+        </p:nvSpPr>
+        <p:spPr>
+          <a:xfrm>
+            <a:off x="640080" y="4494276"/>
+            <a:ext cx="10911535" cy="310896"/>
+          </a:xfrm>
+          <a:prstGeom prst="rect">
+            <a:avLst/>
+          </a:prstGeom>
+          <a:noFill/>
+        </p:spPr>
+        <p:txBody>
+          <a:bodyPr wrap="square">
+            <a:spAutoFit/>
+          </a:bodyPr>
+          <a:lstStyle/>
+          <a:p>
+            <a:pPr algn="ctr"/>
+            <a:r>
+              <a:rPr sz="2000" b="0" i="0">
+                <a:solidFill>
+                  <a:srgbClr val="828282"/>
+                </a:solidFill>
+                <a:latin typeface="Arial"/>
+              </a:rPr>
+              <a:t>聖徒たちの中で私は上ります</a:t>
+            </a:r>
+          </a:p>
+        </p:txBody>
+      </p:sp>
     </p:spTree>
   </p:cSld>
   <p:clrMapOvr>
@@ -3811,6 +4161,76 @@
           </a:p>
         </p:txBody>
       </p:sp>
+      <p:sp>
+        <p:nvSpPr>
+          <p:cNvPr id="4" name="TextBox 3"/>
+          <p:cNvSpPr txBox="1"/>
+          <p:nvPr/>
+        </p:nvSpPr>
+        <p:spPr>
+          <a:xfrm>
+            <a:off x="640080" y="4128516"/>
+            <a:ext cx="10911535" cy="310896"/>
+          </a:xfrm>
+          <a:prstGeom prst="rect">
+            <a:avLst/>
+          </a:prstGeom>
+          <a:noFill/>
+        </p:spPr>
+        <p:txBody>
+          <a:bodyPr wrap="square">
+            <a:spAutoFit/>
+          </a:bodyPr>
+          <a:lstStyle/>
+          <a:p>
+            <a:pPr algn="ctr"/>
+            <a:r>
+              <a:rPr sz="2000" b="0" i="0">
+                <a:solidFill>
+                  <a:srgbClr val="828282"/>
+                </a:solidFill>
+                <a:latin typeface="Arial"/>
+              </a:rPr>
+              <a:t>その御顔を見つめます</a:t>
+            </a:r>
+          </a:p>
+        </p:txBody>
+      </p:sp>
+      <p:sp>
+        <p:nvSpPr>
+          <p:cNvPr id="5" name="TextBox 4"/>
+          <p:cNvSpPr txBox="1"/>
+          <p:nvPr/>
+        </p:nvSpPr>
+        <p:spPr>
+          <a:xfrm>
+            <a:off x="640080" y="4494276"/>
+            <a:ext cx="10911535" cy="310896"/>
+          </a:xfrm>
+          <a:prstGeom prst="rect">
+            <a:avLst/>
+          </a:prstGeom>
+          <a:noFill/>
+        </p:spPr>
+        <p:txBody>
+          <a:bodyPr wrap="square">
+            <a:spAutoFit/>
+          </a:bodyPr>
+          <a:lstStyle/>
+          <a:p>
+            <a:pPr algn="ctr"/>
+            <a:r>
+              <a:rPr sz="2000" b="0" i="0">
+                <a:solidFill>
+                  <a:srgbClr val="828282"/>
+                </a:solidFill>
+                <a:latin typeface="Arial"/>
+              </a:rPr>
+              <a:t>わが神の名を褒め称えよ</a:t>
+            </a:r>
+          </a:p>
+        </p:txBody>
+      </p:sp>
     </p:spTree>
   </p:cSld>
   <p:clrMapOvr>
@@ -3907,6 +4327,41 @@
           </a:p>
         </p:txBody>
       </p:sp>
+      <p:sp>
+        <p:nvSpPr>
+          <p:cNvPr id="4" name="TextBox 3"/>
+          <p:cNvSpPr txBox="1"/>
+          <p:nvPr/>
+        </p:nvSpPr>
+        <p:spPr>
+          <a:xfrm>
+            <a:off x="640080" y="4128516"/>
+            <a:ext cx="10911535" cy="310896"/>
+          </a:xfrm>
+          <a:prstGeom prst="rect">
+            <a:avLst/>
+          </a:prstGeom>
+          <a:noFill/>
+        </p:spPr>
+        <p:txBody>
+          <a:bodyPr wrap="square">
+            <a:spAutoFit/>
+          </a:bodyPr>
+          <a:lstStyle/>
+          <a:p>
+            <a:pPr algn="ctr"/>
+            <a:r>
+              <a:rPr sz="2000" b="0" i="0">
+                <a:solidFill>
+                  <a:srgbClr val="828282"/>
+                </a:solidFill>
+                <a:latin typeface="Arial"/>
+              </a:rPr>
+              <a:t>絶えずその名を褒め称えよ</a:t>
+            </a:r>
+          </a:p>
+        </p:txBody>
+      </p:sp>
     </p:spTree>
   </p:cSld>
   <p:clrMapOvr>
@@ -4256,6 +4711,41 @@
           </a:p>
         </p:txBody>
       </p:sp>
+      <p:sp>
+        <p:nvSpPr>
+          <p:cNvPr id="3" name="TextBox 2"/>
+          <p:cNvSpPr txBox="1"/>
+          <p:nvPr/>
+        </p:nvSpPr>
+        <p:spPr>
+          <a:xfrm>
+            <a:off x="640080" y="3845052"/>
+            <a:ext cx="10911535" cy="310896"/>
+          </a:xfrm>
+          <a:prstGeom prst="rect">
+            <a:avLst/>
+          </a:prstGeom>
+          <a:noFill/>
+        </p:spPr>
+        <p:txBody>
+          <a:bodyPr wrap="square">
+            <a:spAutoFit/>
+          </a:bodyPr>
+          <a:lstStyle/>
+          <a:p>
+            <a:pPr algn="ctr"/>
+            <a:r>
+              <a:rPr sz="2000" b="0" i="0">
+                <a:solidFill>
+                  <a:srgbClr val="828282"/>
+                </a:solidFill>
+                <a:latin typeface="Arial"/>
+              </a:rPr>
+              <a:t>カルバリの丘を見つめます</a:t>
+            </a:r>
+          </a:p>
+        </p:txBody>
+      </p:sp>
     </p:spTree>
   </p:cSld>
   <p:clrMapOvr>
@@ -6089,6 +6579,41 @@
           </a:p>
         </p:txBody>
       </p:sp>
+      <p:sp>
+        <p:nvSpPr>
+          <p:cNvPr id="3" name="TextBox 2"/>
+          <p:cNvSpPr txBox="1"/>
+          <p:nvPr/>
+        </p:nvSpPr>
+        <p:spPr>
+          <a:xfrm>
+            <a:off x="640080" y="3845052"/>
+            <a:ext cx="10911535" cy="310896"/>
+          </a:xfrm>
+          <a:prstGeom prst="rect">
+            <a:avLst/>
+          </a:prstGeom>
+          <a:noFill/>
+        </p:spPr>
+        <p:txBody>
+          <a:bodyPr wrap="square">
+            <a:spAutoFit/>
+          </a:bodyPr>
+          <a:lstStyle/>
+          <a:p>
+            <a:pPr algn="ctr"/>
+            <a:r>
+              <a:rPr sz="2000" b="0" i="0">
+                <a:solidFill>
+                  <a:srgbClr val="828282"/>
+                </a:solidFill>
+                <a:latin typeface="Arial"/>
+              </a:rPr>
+              <a:t>イエスは私のために死なれました</a:t>
+            </a:r>
+          </a:p>
+        </p:txBody>
+      </p:sp>
     </p:spTree>
   </p:cSld>
   <p:clrMapOvr>
@@ -6281,6 +6806,41 @@
           </a:p>
         </p:txBody>
       </p:sp>
+      <p:sp>
+        <p:nvSpPr>
+          <p:cNvPr id="3" name="TextBox 2"/>
+          <p:cNvSpPr txBox="1"/>
+          <p:nvPr/>
+        </p:nvSpPr>
+        <p:spPr>
+          <a:xfrm>
+            <a:off x="640080" y="3845052"/>
+            <a:ext cx="10911535" cy="310896"/>
+          </a:xfrm>
+          <a:prstGeom prst="rect">
+            <a:avLst/>
+          </a:prstGeom>
+          <a:noFill/>
+        </p:spPr>
+        <p:txBody>
+          <a:bodyPr wrap="square">
+            <a:spAutoFit/>
+          </a:bodyPr>
+          <a:lstStyle/>
+          <a:p>
+            <a:pPr algn="ctr"/>
+            <a:r>
+              <a:rPr sz="2000" b="0" i="0">
+                <a:solidFill>
+                  <a:srgbClr val="828282"/>
+                </a:solidFill>
+                <a:latin typeface="Arial"/>
+              </a:rPr>
+              <a:t>彼の苦しみに満ちた体が見えます</a:t>
+            </a:r>
+          </a:p>
+        </p:txBody>
+      </p:sp>
     </p:spTree>
   </p:cSld>
   <p:clrMapOvr>
@@ -6508,6 +7068,76 @@
           </a:p>
         </p:txBody>
       </p:sp>
+      <p:sp>
+        <p:nvSpPr>
+          <p:cNvPr id="4" name="TextBox 3"/>
+          <p:cNvSpPr txBox="1"/>
+          <p:nvPr/>
+        </p:nvSpPr>
+        <p:spPr>
+          <a:xfrm>
+            <a:off x="640080" y="4128516"/>
+            <a:ext cx="10911535" cy="310896"/>
+          </a:xfrm>
+          <a:prstGeom prst="rect">
+            <a:avLst/>
+          </a:prstGeom>
+          <a:noFill/>
+        </p:spPr>
+        <p:txBody>
+          <a:bodyPr wrap="square">
+            <a:spAutoFit/>
+          </a:bodyPr>
+          <a:lstStyle/>
+          <a:p>
+            <a:pPr algn="ctr"/>
+            <a:r>
+              <a:rPr sz="2000" b="0" i="0">
+                <a:solidFill>
+                  <a:srgbClr val="828282"/>
+                </a:solidFill>
+                <a:latin typeface="Arial"/>
+              </a:rPr>
+              <a:t>あの十字架で、わが救い主よ</a:t>
+            </a:r>
+          </a:p>
+        </p:txBody>
+      </p:sp>
+      <p:sp>
+        <p:nvSpPr>
+          <p:cNvPr id="5" name="TextBox 4"/>
+          <p:cNvSpPr txBox="1"/>
+          <p:nvPr/>
+        </p:nvSpPr>
+        <p:spPr>
+          <a:xfrm>
+            <a:off x="640080" y="4494276"/>
+            <a:ext cx="10911535" cy="310896"/>
+          </a:xfrm>
+          <a:prstGeom prst="rect">
+            <a:avLst/>
+          </a:prstGeom>
+          <a:noFill/>
+        </p:spPr>
+        <p:txBody>
+          <a:bodyPr wrap="square">
+            <a:spAutoFit/>
+          </a:bodyPr>
+          <a:lstStyle/>
+          <a:p>
+            <a:pPr algn="ctr"/>
+            <a:r>
+              <a:rPr sz="2000" b="0" i="0">
+                <a:solidFill>
+                  <a:srgbClr val="828282"/>
+                </a:solidFill>
+                <a:latin typeface="Arial"/>
+              </a:rPr>
+              <a:t>彼の体は埋葬されました</a:t>
+            </a:r>
+          </a:p>
+        </p:txBody>
+      </p:sp>
     </p:spTree>
   </p:cSld>
   <p:clrMapOvr>
@@ -6600,6 +7230,76 @@
                 <a:latin typeface="Arial"/>
               </a:rPr>
               <a:t>Sozinho ali, O Rei ficou</a:t>
+            </a:r>
+          </a:p>
+        </p:txBody>
+      </p:sp>
+      <p:sp>
+        <p:nvSpPr>
+          <p:cNvPr id="4" name="TextBox 3"/>
+          <p:cNvSpPr txBox="1"/>
+          <p:nvPr/>
+        </p:nvSpPr>
+        <p:spPr>
+          <a:xfrm>
+            <a:off x="640080" y="4128516"/>
+            <a:ext cx="10911535" cy="310896"/>
+          </a:xfrm>
+          <a:prstGeom prst="rect">
+            <a:avLst/>
+          </a:prstGeom>
+          <a:noFill/>
+        </p:spPr>
+        <p:txBody>
+          <a:bodyPr wrap="square">
+            <a:spAutoFit/>
+          </a:bodyPr>
+          <a:lstStyle/>
+          <a:p>
+            <a:pPr algn="ctr"/>
+            <a:r>
+              <a:rPr sz="2000" b="0" i="0">
+                <a:solidFill>
+                  <a:srgbClr val="828282"/>
+                </a:solidFill>
+                <a:latin typeface="Arial"/>
+              </a:rPr>
+              <a:t>ヨセフが買った墓に</a:t>
+            </a:r>
+          </a:p>
+        </p:txBody>
+      </p:sp>
+      <p:sp>
+        <p:nvSpPr>
+          <p:cNvPr id="5" name="TextBox 4"/>
+          <p:cNvSpPr txBox="1"/>
+          <p:nvPr/>
+        </p:nvSpPr>
+        <p:spPr>
+          <a:xfrm>
+            <a:off x="640080" y="4494276"/>
+            <a:ext cx="10911535" cy="310896"/>
+          </a:xfrm>
+          <a:prstGeom prst="rect">
+            <a:avLst/>
+          </a:prstGeom>
+          <a:noFill/>
+        </p:spPr>
+        <p:txBody>
+          <a:bodyPr wrap="square">
+            <a:spAutoFit/>
+          </a:bodyPr>
+          <a:lstStyle/>
+          <a:p>
+            <a:pPr algn="ctr"/>
+            <a:r>
+              <a:rPr sz="2000" b="0" i="0">
+                <a:solidFill>
+                  <a:srgbClr val="828282"/>
+                </a:solidFill>
+                <a:latin typeface="Arial"/>
+              </a:rPr>
+              <a:t>そこに一人、王は留まられました</a:t>
             </a:r>
           </a:p>
         </p:txBody>
